--- a/public/lessons/year-6-maths/summer/week-27/reflect-shapes/teaching-powerpoint-v1.pptx
+++ b/public/lessons/year-6-maths/summer/week-27/reflect-shapes/teaching-powerpoint-v1.pptx
@@ -2,24 +2,24 @@
 <file path=ppt/presentation.xml><?xml version="1.0" encoding="utf-8"?>
 <p:presentation xmlns:p="http://schemas.openxmlformats.org/presentationml/2006/main">
   <p:sldMasterIdLst>
-    <p:sldMasterId xmlns:r="http://schemas.openxmlformats.org/officeDocument/2006/relationships" id="2147483648" r:id="Rd40864637cb44e92"/>
+    <p:sldMasterId xmlns:r="http://schemas.openxmlformats.org/officeDocument/2006/relationships" id="2147483648" r:id="R8d11e9088467403f"/>
   </p:sldMasterIdLst>
   <p:notesMasterIdLst>
-    <p:notesMasterId xmlns:r="http://schemas.openxmlformats.org/officeDocument/2006/relationships" r:id="R1bfd168f426a474c"/>
+    <p:notesMasterId xmlns:r="http://schemas.openxmlformats.org/officeDocument/2006/relationships" r:id="R9c17bccda2444c3a"/>
   </p:notesMasterIdLst>
   <p:sldIdLst>
-    <p:sldId xmlns:r="http://schemas.openxmlformats.org/officeDocument/2006/relationships" id="256" r:id="R97ef9f5774714b2b"/>
-    <p:sldId xmlns:r="http://schemas.openxmlformats.org/officeDocument/2006/relationships" id="257" r:id="R5ff6e8f40f0140de"/>
-    <p:sldId xmlns:r="http://schemas.openxmlformats.org/officeDocument/2006/relationships" id="258" r:id="R0e13369b0799494b"/>
-    <p:sldId xmlns:r="http://schemas.openxmlformats.org/officeDocument/2006/relationships" id="259" r:id="Rae174b5f7ed344c5"/>
-    <p:sldId xmlns:r="http://schemas.openxmlformats.org/officeDocument/2006/relationships" id="260" r:id="R83b984abbf65486b"/>
-    <p:sldId xmlns:r="http://schemas.openxmlformats.org/officeDocument/2006/relationships" id="261" r:id="R5e9b207645f64870"/>
-    <p:sldId xmlns:r="http://schemas.openxmlformats.org/officeDocument/2006/relationships" id="262" r:id="R5123c2ca7a2f4765"/>
-    <p:sldId xmlns:r="http://schemas.openxmlformats.org/officeDocument/2006/relationships" id="263" r:id="R92d489b395d34b37"/>
-    <p:sldId xmlns:r="http://schemas.openxmlformats.org/officeDocument/2006/relationships" id="264" r:id="Rfa1f9a5c58e64ecc"/>
-    <p:sldId xmlns:r="http://schemas.openxmlformats.org/officeDocument/2006/relationships" id="265" r:id="R3c5b7bb1b9a74f90"/>
-    <p:sldId xmlns:r="http://schemas.openxmlformats.org/officeDocument/2006/relationships" id="266" r:id="R26f1d33110fb414a"/>
-    <p:sldId xmlns:r="http://schemas.openxmlformats.org/officeDocument/2006/relationships" id="267" r:id="R1923317efa5a40a8"/>
+    <p:sldId xmlns:r="http://schemas.openxmlformats.org/officeDocument/2006/relationships" id="256" r:id="R1928ea66463e41e5"/>
+    <p:sldId xmlns:r="http://schemas.openxmlformats.org/officeDocument/2006/relationships" id="257" r:id="R107daea896b74e1b"/>
+    <p:sldId xmlns:r="http://schemas.openxmlformats.org/officeDocument/2006/relationships" id="258" r:id="R7a8bcc6c6e3b4d0b"/>
+    <p:sldId xmlns:r="http://schemas.openxmlformats.org/officeDocument/2006/relationships" id="259" r:id="R6d5c254f97704dff"/>
+    <p:sldId xmlns:r="http://schemas.openxmlformats.org/officeDocument/2006/relationships" id="260" r:id="R6d68fe260d5c4433"/>
+    <p:sldId xmlns:r="http://schemas.openxmlformats.org/officeDocument/2006/relationships" id="261" r:id="R2853ca1efe3442e3"/>
+    <p:sldId xmlns:r="http://schemas.openxmlformats.org/officeDocument/2006/relationships" id="262" r:id="Red31c0ed654e4f5b"/>
+    <p:sldId xmlns:r="http://schemas.openxmlformats.org/officeDocument/2006/relationships" id="263" r:id="R6cca12e0666e49fa"/>
+    <p:sldId xmlns:r="http://schemas.openxmlformats.org/officeDocument/2006/relationships" id="264" r:id="Re1b4258f968340cd"/>
+    <p:sldId xmlns:r="http://schemas.openxmlformats.org/officeDocument/2006/relationships" id="265" r:id="Ra4d6346eebd34075"/>
+    <p:sldId xmlns:r="http://schemas.openxmlformats.org/officeDocument/2006/relationships" id="266" r:id="R8ed65482b62042b1"/>
+    <p:sldId xmlns:r="http://schemas.openxmlformats.org/officeDocument/2006/relationships" id="267" r:id="R68b97db90020416c"/>
   </p:sldIdLst>
   <p:sldSz cx="12192000" cy="6858000"/>
   <p:notesSz cx="6858000" cy="9144000"/>
@@ -873,7 +873,7 @@
           <a:lstStyle xmlns:a="http://schemas.openxmlformats.org/drawingml/2006/main"/>
           <a:p xmlns:a="http://schemas.openxmlformats.org/drawingml/2006/main">
             <a:r>
-              <a:t>I do. Reveal the question, setup and each calculation stage one click at a time. Pupils watch before copying. Model answer: (6, 2).</a:t>
+              <a:t>I do. Reveal the question, then reveal each mathematical change one click at a time. Point to the numbers and operation that changed before moving to the next line. Final answer: (6, 2).</a:t>
             </a:r>
           </a:p>
         </p:txBody>
@@ -1291,7 +1291,7 @@
   </p:cSld>
   <p:clrMap bg1="lt1" tx1="dk1" bg2="lt2" tx2="dk2" accent1="accent1" accent2="accent2" accent3="accent3" accent4="accent4" accent5="accent5" accent6="accent6" hlink="hlink" folHlink="folHlink"/>
   <p:sldLayoutIdLst>
-    <p:sldLayoutId xmlns:r="http://schemas.openxmlformats.org/officeDocument/2006/relationships" id="2147483649" r:id="Rfd8ba3fa419142ec"/>
+    <p:sldLayoutId xmlns:r="http://schemas.openxmlformats.org/officeDocument/2006/relationships" id="2147483649" r:id="Rb42b307fba5c405f"/>
   </p:sldLayoutIdLst>
   <p:txStyles>
     <p:titleStyle>
@@ -1842,7 +1842,7 @@
           <p:cNvPr id="12" name="">
             <a:extLst xmlns:a="http://schemas.openxmlformats.org/drawingml/2006/main">
               <a:ext uri="{FF2B5EF4-FFF2-40B4-BE49-F238E27FC236}">
-                <a16:creationId xmlns:a16="http://schemas.microsoft.com/office/drawing/2014/main" id="{1584C4D5-34CB-46BA-88B9-2EA444E4C288}"/>
+                <a16:creationId xmlns:a16="http://schemas.microsoft.com/office/drawing/2014/main" id="{F09AC3C5-1650-4CDE-A030-AF59BFA430D8}"/>
               </a:ext>
             </a:extLst>
           </p:cNvPr>
@@ -1874,7 +1874,7 @@
           <p:cNvPr id="2" name="">
             <a:extLst xmlns:a="http://schemas.openxmlformats.org/drawingml/2006/main">
               <a:ext uri="{FF2B5EF4-FFF2-40B4-BE49-F238E27FC236}">
-                <a16:creationId xmlns:a16="http://schemas.microsoft.com/office/drawing/2014/main" id="{67952ED3-A818-44BB-A099-EAA884F2AB72}"/>
+                <a16:creationId xmlns:a16="http://schemas.microsoft.com/office/drawing/2014/main" id="{85992CA2-3BD3-4F1C-9292-6A33B5BCF7CF}"/>
               </a:ext>
             </a:extLst>
           </p:cNvPr>
@@ -1931,7 +1931,7 @@
           <p:cNvPr id="3" name="">
             <a:extLst xmlns:a="http://schemas.openxmlformats.org/drawingml/2006/main">
               <a:ext uri="{FF2B5EF4-FFF2-40B4-BE49-F238E27FC236}">
-                <a16:creationId xmlns:a16="http://schemas.microsoft.com/office/drawing/2014/main" id="{D3250248-E1B2-4ACD-9DCF-869EF15DDCF7}"/>
+                <a16:creationId xmlns:a16="http://schemas.microsoft.com/office/drawing/2014/main" id="{A8F43239-DFFD-4A2C-A527-0A7E83A16DC6}"/>
               </a:ext>
             </a:extLst>
           </p:cNvPr>
@@ -1965,7 +1965,7 @@
           <p:cNvPr id="4" name="">
             <a:extLst xmlns:a="http://schemas.openxmlformats.org/drawingml/2006/main">
               <a:ext uri="{FF2B5EF4-FFF2-40B4-BE49-F238E27FC236}">
-                <a16:creationId xmlns:a16="http://schemas.microsoft.com/office/drawing/2014/main" id="{DD976E22-E23D-4161-80FA-64651362DE69}"/>
+                <a16:creationId xmlns:a16="http://schemas.microsoft.com/office/drawing/2014/main" id="{8796E4C4-7A2F-42F6-BE16-36694D870D6F}"/>
               </a:ext>
             </a:extLst>
           </p:cNvPr>
@@ -2022,7 +2022,7 @@
           <p:cNvPr id="5" name="">
             <a:extLst xmlns:a="http://schemas.openxmlformats.org/drawingml/2006/main">
               <a:ext uri="{FF2B5EF4-FFF2-40B4-BE49-F238E27FC236}">
-                <a16:creationId xmlns:a16="http://schemas.microsoft.com/office/drawing/2014/main" id="{50CD995D-6262-405E-B9A3-74E5958C6E79}"/>
+                <a16:creationId xmlns:a16="http://schemas.microsoft.com/office/drawing/2014/main" id="{E9335CBD-169B-437B-883E-7B4D81D431D7}"/>
               </a:ext>
             </a:extLst>
           </p:cNvPr>
@@ -2079,7 +2079,7 @@
           <p:cNvPr id="6" name="">
             <a:extLst xmlns:a="http://schemas.openxmlformats.org/drawingml/2006/main">
               <a:ext uri="{FF2B5EF4-FFF2-40B4-BE49-F238E27FC236}">
-                <a16:creationId xmlns:a16="http://schemas.microsoft.com/office/drawing/2014/main" id="{8A6D1DE3-6908-44A8-B93A-45D883DD23A6}"/>
+                <a16:creationId xmlns:a16="http://schemas.microsoft.com/office/drawing/2014/main" id="{5221564B-756B-4B1B-A3E2-4AC5B31F212E}"/>
               </a:ext>
             </a:extLst>
           </p:cNvPr>
@@ -2113,7 +2113,7 @@
           <p:cNvPr id="7" name="">
             <a:extLst xmlns:a="http://schemas.openxmlformats.org/drawingml/2006/main">
               <a:ext uri="{FF2B5EF4-FFF2-40B4-BE49-F238E27FC236}">
-                <a16:creationId xmlns:a16="http://schemas.microsoft.com/office/drawing/2014/main" id="{DA94D59B-2F4C-493E-AC7B-E6A882BE0663}"/>
+                <a16:creationId xmlns:a16="http://schemas.microsoft.com/office/drawing/2014/main" id="{14465420-2AF0-44A7-A716-B1F6D59AEC97}"/>
               </a:ext>
             </a:extLst>
           </p:cNvPr>
@@ -2170,7 +2170,7 @@
           <p:cNvPr id="8" name="">
             <a:extLst xmlns:a="http://schemas.openxmlformats.org/drawingml/2006/main">
               <a:ext uri="{FF2B5EF4-FFF2-40B4-BE49-F238E27FC236}">
-                <a16:creationId xmlns:a16="http://schemas.microsoft.com/office/drawing/2014/main" id="{4F40D430-973F-4782-AC0C-60E39D11F702}"/>
+                <a16:creationId xmlns:a16="http://schemas.microsoft.com/office/drawing/2014/main" id="{9C2A4AED-8B0B-4818-9315-67E26A48C060}"/>
               </a:ext>
             </a:extLst>
           </p:cNvPr>
@@ -2227,7 +2227,7 @@
           <p:cNvPr id="9" name="">
             <a:extLst xmlns:a="http://schemas.openxmlformats.org/drawingml/2006/main">
               <a:ext uri="{FF2B5EF4-FFF2-40B4-BE49-F238E27FC236}">
-                <a16:creationId xmlns:a16="http://schemas.microsoft.com/office/drawing/2014/main" id="{0AF0893A-AA43-4BE1-A637-70C830686226}"/>
+                <a16:creationId xmlns:a16="http://schemas.microsoft.com/office/drawing/2014/main" id="{45CD1A12-D027-4C84-8CC2-59EFFF379F4E}"/>
               </a:ext>
             </a:extLst>
           </p:cNvPr>
@@ -2284,7 +2284,7 @@
           <p:cNvPr id="10" name="">
             <a:extLst xmlns:a="http://schemas.openxmlformats.org/drawingml/2006/main">
               <a:ext uri="{FF2B5EF4-FFF2-40B4-BE49-F238E27FC236}">
-                <a16:creationId xmlns:a16="http://schemas.microsoft.com/office/drawing/2014/main" id="{C0DB69A2-DF4A-4ED9-AA3D-6F94149DE683}"/>
+                <a16:creationId xmlns:a16="http://schemas.microsoft.com/office/drawing/2014/main" id="{C6B7E0B3-51A4-4570-BD1D-9312123AFAB7}"/>
               </a:ext>
             </a:extLst>
           </p:cNvPr>
@@ -2341,7 +2341,7 @@
           <p:cNvPr id="11" name="">
             <a:extLst xmlns:a="http://schemas.openxmlformats.org/drawingml/2006/main">
               <a:ext uri="{FF2B5EF4-FFF2-40B4-BE49-F238E27FC236}">
-                <a16:creationId xmlns:a16="http://schemas.microsoft.com/office/drawing/2014/main" id="{CE95D11D-D627-49BB-AE72-66285CA9F993}"/>
+                <a16:creationId xmlns:a16="http://schemas.microsoft.com/office/drawing/2014/main" id="{B64130E8-E669-4C1D-8607-5C0CCA89EFDB}"/>
               </a:ext>
             </a:extLst>
           </p:cNvPr>
@@ -2396,7 +2396,7 @@
     </p:spTree>
     <p:extLst>
       <p:ext uri="{BB962C8B-B14F-4D97-AF65-F5344CB8AC3E}">
-        <p14:creationId xmlns:p14="http://schemas.microsoft.com/office/powerpoint/2010/main" val="1486866322"/>
+        <p14:creationId xmlns:p14="http://schemas.microsoft.com/office/powerpoint/2010/main" val="637161166"/>
       </p:ext>
     </p:extLst>
   </p:cSld>
@@ -2427,7 +2427,7 @@
           <p:cNvPr id="14" name="">
             <a:extLst xmlns:a="http://schemas.openxmlformats.org/drawingml/2006/main">
               <a:ext uri="{FF2B5EF4-FFF2-40B4-BE49-F238E27FC236}">
-                <a16:creationId xmlns:a16="http://schemas.microsoft.com/office/drawing/2014/main" id="{A2AFB696-A624-4DA1-B64A-CB2C7ABB5C44}"/>
+                <a16:creationId xmlns:a16="http://schemas.microsoft.com/office/drawing/2014/main" id="{5363AE03-99DF-4DE0-9142-EAB9E9899124}"/>
               </a:ext>
             </a:extLst>
           </p:cNvPr>
@@ -2459,7 +2459,7 @@
           <p:cNvPr id="2" name="">
             <a:extLst xmlns:a="http://schemas.openxmlformats.org/drawingml/2006/main">
               <a:ext uri="{FF2B5EF4-FFF2-40B4-BE49-F238E27FC236}">
-                <a16:creationId xmlns:a16="http://schemas.microsoft.com/office/drawing/2014/main" id="{B13D9B67-A4A2-4C4A-ACE2-6C213A0C08E8}"/>
+                <a16:creationId xmlns:a16="http://schemas.microsoft.com/office/drawing/2014/main" id="{532B7E3F-1573-4A12-AE65-26A8A255FE3A}"/>
               </a:ext>
             </a:extLst>
           </p:cNvPr>
@@ -2516,7 +2516,7 @@
           <p:cNvPr id="3" name="">
             <a:extLst xmlns:a="http://schemas.openxmlformats.org/drawingml/2006/main">
               <a:ext uri="{FF2B5EF4-FFF2-40B4-BE49-F238E27FC236}">
-                <a16:creationId xmlns:a16="http://schemas.microsoft.com/office/drawing/2014/main" id="{CE261A42-6CDB-4B5E-99C8-A94CBE1DF760}"/>
+                <a16:creationId xmlns:a16="http://schemas.microsoft.com/office/drawing/2014/main" id="{141AC709-2D2E-4344-BE66-76E70FACCC23}"/>
               </a:ext>
             </a:extLst>
           </p:cNvPr>
@@ -2548,7 +2548,7 @@
           <p:cNvPr id="4" name="">
             <a:extLst xmlns:a="http://schemas.openxmlformats.org/drawingml/2006/main">
               <a:ext uri="{FF2B5EF4-FFF2-40B4-BE49-F238E27FC236}">
-                <a16:creationId xmlns:a16="http://schemas.microsoft.com/office/drawing/2014/main" id="{78C27A87-E4E9-46D8-B83B-AA2BABD78887}"/>
+                <a16:creationId xmlns:a16="http://schemas.microsoft.com/office/drawing/2014/main" id="{E3A8EEB6-0756-4F13-8EF3-313472DF04A9}"/>
               </a:ext>
             </a:extLst>
           </p:cNvPr>
@@ -2605,7 +2605,7 @@
           <p:cNvPr id="5" name="">
             <a:extLst xmlns:a="http://schemas.openxmlformats.org/drawingml/2006/main">
               <a:ext uri="{FF2B5EF4-FFF2-40B4-BE49-F238E27FC236}">
-                <a16:creationId xmlns:a16="http://schemas.microsoft.com/office/drawing/2014/main" id="{AA9F1688-847A-45D1-8DC1-99B8467C3F56}"/>
+                <a16:creationId xmlns:a16="http://schemas.microsoft.com/office/drawing/2014/main" id="{7D230B11-82D2-48E7-B85C-71B5F9C0681E}"/>
               </a:ext>
             </a:extLst>
           </p:cNvPr>
@@ -2662,7 +2662,7 @@
           <p:cNvPr id="6" name="">
             <a:extLst xmlns:a="http://schemas.openxmlformats.org/drawingml/2006/main">
               <a:ext uri="{FF2B5EF4-FFF2-40B4-BE49-F238E27FC236}">
-                <a16:creationId xmlns:a16="http://schemas.microsoft.com/office/drawing/2014/main" id="{EC29BFDD-B779-41D2-856B-46F0831D9839}"/>
+                <a16:creationId xmlns:a16="http://schemas.microsoft.com/office/drawing/2014/main" id="{D40C69ED-D8FD-492A-8F98-55CD819974CC}"/>
               </a:ext>
             </a:extLst>
           </p:cNvPr>
@@ -2719,7 +2719,7 @@
           <p:cNvPr id="7" name="">
             <a:extLst xmlns:a="http://schemas.openxmlformats.org/drawingml/2006/main">
               <a:ext uri="{FF2B5EF4-FFF2-40B4-BE49-F238E27FC236}">
-                <a16:creationId xmlns:a16="http://schemas.microsoft.com/office/drawing/2014/main" id="{7F09F91A-8606-46F3-8AC5-57D0A5450612}"/>
+                <a16:creationId xmlns:a16="http://schemas.microsoft.com/office/drawing/2014/main" id="{DD13A5AE-3A24-4357-B61E-176726E815CC}"/>
               </a:ext>
             </a:extLst>
           </p:cNvPr>
@@ -2751,7 +2751,7 @@
           <p:cNvPr id="8" name="">
             <a:extLst xmlns:a="http://schemas.openxmlformats.org/drawingml/2006/main">
               <a:ext uri="{FF2B5EF4-FFF2-40B4-BE49-F238E27FC236}">
-                <a16:creationId xmlns:a16="http://schemas.microsoft.com/office/drawing/2014/main" id="{8ED83FEA-B842-4478-926B-F79E47039039}"/>
+                <a16:creationId xmlns:a16="http://schemas.microsoft.com/office/drawing/2014/main" id="{7CF17F61-40BC-4698-A1EA-7FB791C0B105}"/>
               </a:ext>
             </a:extLst>
           </p:cNvPr>
@@ -2808,7 +2808,7 @@
           <p:cNvPr id="9" name="">
             <a:extLst xmlns:a="http://schemas.openxmlformats.org/drawingml/2006/main">
               <a:ext uri="{FF2B5EF4-FFF2-40B4-BE49-F238E27FC236}">
-                <a16:creationId xmlns:a16="http://schemas.microsoft.com/office/drawing/2014/main" id="{36AE3E82-FF3E-47C1-892C-211FA0B1BE2E}"/>
+                <a16:creationId xmlns:a16="http://schemas.microsoft.com/office/drawing/2014/main" id="{EF28634E-AD36-4A7A-909C-9E2EBAD13F9E}"/>
               </a:ext>
             </a:extLst>
           </p:cNvPr>
@@ -2865,7 +2865,7 @@
           <p:cNvPr id="10" name="">
             <a:extLst xmlns:a="http://schemas.openxmlformats.org/drawingml/2006/main">
               <a:ext uri="{FF2B5EF4-FFF2-40B4-BE49-F238E27FC236}">
-                <a16:creationId xmlns:a16="http://schemas.microsoft.com/office/drawing/2014/main" id="{917D20A0-9EEC-4D29-9285-872DE73434E5}"/>
+                <a16:creationId xmlns:a16="http://schemas.microsoft.com/office/drawing/2014/main" id="{A17BEE4D-4635-4E9A-9EF1-22E0271969F4}"/>
               </a:ext>
             </a:extLst>
           </p:cNvPr>
@@ -2922,7 +2922,7 @@
           <p:cNvPr id="11" name="">
             <a:extLst xmlns:a="http://schemas.openxmlformats.org/drawingml/2006/main">
               <a:ext uri="{FF2B5EF4-FFF2-40B4-BE49-F238E27FC236}">
-                <a16:creationId xmlns:a16="http://schemas.microsoft.com/office/drawing/2014/main" id="{BC463402-89F5-4E60-BA72-F14883D80EF8}"/>
+                <a16:creationId xmlns:a16="http://schemas.microsoft.com/office/drawing/2014/main" id="{91592BEA-1F44-4E07-B14E-19C566BF1BD7}"/>
               </a:ext>
             </a:extLst>
           </p:cNvPr>
@@ -2979,7 +2979,7 @@
           <p:cNvPr id="12" name="">
             <a:extLst xmlns:a="http://schemas.openxmlformats.org/drawingml/2006/main">
               <a:ext uri="{FF2B5EF4-FFF2-40B4-BE49-F238E27FC236}">
-                <a16:creationId xmlns:a16="http://schemas.microsoft.com/office/drawing/2014/main" id="{01187348-AC0F-419E-819F-FBA02CB1F7F2}"/>
+                <a16:creationId xmlns:a16="http://schemas.microsoft.com/office/drawing/2014/main" id="{F0F8555B-F8A4-448F-BFD5-0EC5F27B6D96}"/>
               </a:ext>
             </a:extLst>
           </p:cNvPr>
@@ -3036,7 +3036,7 @@
           <p:cNvPr id="13" name="">
             <a:extLst xmlns:a="http://schemas.openxmlformats.org/drawingml/2006/main">
               <a:ext uri="{FF2B5EF4-FFF2-40B4-BE49-F238E27FC236}">
-                <a16:creationId xmlns:a16="http://schemas.microsoft.com/office/drawing/2014/main" id="{E3F39126-2194-4531-B511-17F00EF59587}"/>
+                <a16:creationId xmlns:a16="http://schemas.microsoft.com/office/drawing/2014/main" id="{5F3D3BE0-54B1-4382-A4FE-4AC199AC2508}"/>
               </a:ext>
             </a:extLst>
           </p:cNvPr>
@@ -3091,7 +3091,7 @@
     </p:spTree>
     <p:extLst>
       <p:ext uri="{BB962C8B-B14F-4D97-AF65-F5344CB8AC3E}">
-        <p14:creationId xmlns:p14="http://schemas.microsoft.com/office/powerpoint/2010/main" val="2044708567"/>
+        <p14:creationId xmlns:p14="http://schemas.microsoft.com/office/powerpoint/2010/main" val="565537723"/>
       </p:ext>
     </p:extLst>
   </p:cSld>
@@ -3292,7 +3292,7 @@
           <p:cNvPr id="19" name="">
             <a:extLst xmlns:a="http://schemas.openxmlformats.org/drawingml/2006/main">
               <a:ext uri="{FF2B5EF4-FFF2-40B4-BE49-F238E27FC236}">
-                <a16:creationId xmlns:a16="http://schemas.microsoft.com/office/drawing/2014/main" id="{3A861455-24AE-4799-B36E-FAD8CA12A33D}"/>
+                <a16:creationId xmlns:a16="http://schemas.microsoft.com/office/drawing/2014/main" id="{4C07A11B-1C17-4F09-A0EB-2ACADE1F872D}"/>
               </a:ext>
             </a:extLst>
           </p:cNvPr>
@@ -3324,7 +3324,7 @@
           <p:cNvPr id="2" name="">
             <a:extLst xmlns:a="http://schemas.openxmlformats.org/drawingml/2006/main">
               <a:ext uri="{FF2B5EF4-FFF2-40B4-BE49-F238E27FC236}">
-                <a16:creationId xmlns:a16="http://schemas.microsoft.com/office/drawing/2014/main" id="{3843C9A2-76B6-462F-908B-9DF50C44CEDF}"/>
+                <a16:creationId xmlns:a16="http://schemas.microsoft.com/office/drawing/2014/main" id="{38392273-28BD-429A-9C92-60567E23A11D}"/>
               </a:ext>
             </a:extLst>
           </p:cNvPr>
@@ -3381,7 +3381,7 @@
           <p:cNvPr id="3" name="">
             <a:extLst xmlns:a="http://schemas.openxmlformats.org/drawingml/2006/main">
               <a:ext uri="{FF2B5EF4-FFF2-40B4-BE49-F238E27FC236}">
-                <a16:creationId xmlns:a16="http://schemas.microsoft.com/office/drawing/2014/main" id="{8D3F3B9B-5076-4C08-B86E-78D918B202C1}"/>
+                <a16:creationId xmlns:a16="http://schemas.microsoft.com/office/drawing/2014/main" id="{CC81578A-A8ED-4031-983D-79088A0447E0}"/>
               </a:ext>
             </a:extLst>
           </p:cNvPr>
@@ -3413,7 +3413,7 @@
           <p:cNvPr id="4" name="">
             <a:extLst xmlns:a="http://schemas.openxmlformats.org/drawingml/2006/main">
               <a:ext uri="{FF2B5EF4-FFF2-40B4-BE49-F238E27FC236}">
-                <a16:creationId xmlns:a16="http://schemas.microsoft.com/office/drawing/2014/main" id="{12A31D5D-4CE4-49E7-BA9A-A4C854FB47B1}"/>
+                <a16:creationId xmlns:a16="http://schemas.microsoft.com/office/drawing/2014/main" id="{F8C5AC71-4F53-4242-84A7-4F485C123DD0}"/>
               </a:ext>
             </a:extLst>
           </p:cNvPr>
@@ -3470,7 +3470,7 @@
           <p:cNvPr id="5" name="">
             <a:extLst xmlns:a="http://schemas.openxmlformats.org/drawingml/2006/main">
               <a:ext uri="{FF2B5EF4-FFF2-40B4-BE49-F238E27FC236}">
-                <a16:creationId xmlns:a16="http://schemas.microsoft.com/office/drawing/2014/main" id="{3156F0F4-B4D7-457E-97DD-0D4170F6ED65}"/>
+                <a16:creationId xmlns:a16="http://schemas.microsoft.com/office/drawing/2014/main" id="{85E53932-FBE7-401A-A783-DB63C278AA3A}"/>
               </a:ext>
             </a:extLst>
           </p:cNvPr>
@@ -3527,7 +3527,7 @@
           <p:cNvPr id="6" name="">
             <a:extLst xmlns:a="http://schemas.openxmlformats.org/drawingml/2006/main">
               <a:ext uri="{FF2B5EF4-FFF2-40B4-BE49-F238E27FC236}">
-                <a16:creationId xmlns:a16="http://schemas.microsoft.com/office/drawing/2014/main" id="{CFA46DE2-60AD-40F3-B860-C8F8C08A2E55}"/>
+                <a16:creationId xmlns:a16="http://schemas.microsoft.com/office/drawing/2014/main" id="{31486A20-A10C-46DF-9C4E-725EAC811D33}"/>
               </a:ext>
             </a:extLst>
           </p:cNvPr>
@@ -3584,7 +3584,7 @@
           <p:cNvPr id="7" name="">
             <a:extLst xmlns:a="http://schemas.openxmlformats.org/drawingml/2006/main">
               <a:ext uri="{FF2B5EF4-FFF2-40B4-BE49-F238E27FC236}">
-                <a16:creationId xmlns:a16="http://schemas.microsoft.com/office/drawing/2014/main" id="{83C1A46D-B40E-4240-BFB5-24B71491C533}"/>
+                <a16:creationId xmlns:a16="http://schemas.microsoft.com/office/drawing/2014/main" id="{A8C54C4C-5B60-43AB-BEC4-77C34C05D987}"/>
               </a:ext>
             </a:extLst>
           </p:cNvPr>
@@ -3616,7 +3616,7 @@
           <p:cNvPr id="8" name="">
             <a:extLst xmlns:a="http://schemas.openxmlformats.org/drawingml/2006/main">
               <a:ext uri="{FF2B5EF4-FFF2-40B4-BE49-F238E27FC236}">
-                <a16:creationId xmlns:a16="http://schemas.microsoft.com/office/drawing/2014/main" id="{D70D7C32-9874-4EF6-8C1D-DA3502071AFF}"/>
+                <a16:creationId xmlns:a16="http://schemas.microsoft.com/office/drawing/2014/main" id="{BB7FDDF0-9CB7-407E-AB5D-05984013BACD}"/>
               </a:ext>
             </a:extLst>
           </p:cNvPr>
@@ -3673,7 +3673,7 @@
           <p:cNvPr id="9" name="">
             <a:extLst xmlns:a="http://schemas.openxmlformats.org/drawingml/2006/main">
               <a:ext uri="{FF2B5EF4-FFF2-40B4-BE49-F238E27FC236}">
-                <a16:creationId xmlns:a16="http://schemas.microsoft.com/office/drawing/2014/main" id="{A0E11698-71C7-494C-A0F5-CDA03930695A}"/>
+                <a16:creationId xmlns:a16="http://schemas.microsoft.com/office/drawing/2014/main" id="{22C684FD-901E-4925-B893-160A301A8D3C}"/>
               </a:ext>
             </a:extLst>
           </p:cNvPr>
@@ -3730,7 +3730,7 @@
           <p:cNvPr id="10" name="">
             <a:extLst xmlns:a="http://schemas.openxmlformats.org/drawingml/2006/main">
               <a:ext uri="{FF2B5EF4-FFF2-40B4-BE49-F238E27FC236}">
-                <a16:creationId xmlns:a16="http://schemas.microsoft.com/office/drawing/2014/main" id="{7B02B1D4-D89E-4F88-9595-AA139E99C2CA}"/>
+                <a16:creationId xmlns:a16="http://schemas.microsoft.com/office/drawing/2014/main" id="{CF4E7DF1-DE36-4FA2-BB24-2413367FB716}"/>
               </a:ext>
             </a:extLst>
           </p:cNvPr>
@@ -3787,7 +3787,7 @@
           <p:cNvPr id="11" name="">
             <a:extLst xmlns:a="http://schemas.openxmlformats.org/drawingml/2006/main">
               <a:ext uri="{FF2B5EF4-FFF2-40B4-BE49-F238E27FC236}">
-                <a16:creationId xmlns:a16="http://schemas.microsoft.com/office/drawing/2014/main" id="{32C2BD03-93FB-47ED-B67B-1AD9A9EAA004}"/>
+                <a16:creationId xmlns:a16="http://schemas.microsoft.com/office/drawing/2014/main" id="{D816D1F0-AD7D-4639-A0A9-ED5024D28D72}"/>
               </a:ext>
             </a:extLst>
           </p:cNvPr>
@@ -3821,7 +3821,7 @@
           <p:cNvPr id="12" name="">
             <a:extLst xmlns:a="http://schemas.openxmlformats.org/drawingml/2006/main">
               <a:ext uri="{FF2B5EF4-FFF2-40B4-BE49-F238E27FC236}">
-                <a16:creationId xmlns:a16="http://schemas.microsoft.com/office/drawing/2014/main" id="{8E831C31-22A5-4511-921B-58E85F33E1B4}"/>
+                <a16:creationId xmlns:a16="http://schemas.microsoft.com/office/drawing/2014/main" id="{E1CA7559-2DE6-4079-851A-C926B31F43B0}"/>
               </a:ext>
             </a:extLst>
           </p:cNvPr>
@@ -3878,7 +3878,7 @@
           <p:cNvPr id="13" name="">
             <a:extLst xmlns:a="http://schemas.openxmlformats.org/drawingml/2006/main">
               <a:ext uri="{FF2B5EF4-FFF2-40B4-BE49-F238E27FC236}">
-                <a16:creationId xmlns:a16="http://schemas.microsoft.com/office/drawing/2014/main" id="{21EC7AEE-8C1D-41DB-B28F-5A1A70DFE82F}"/>
+                <a16:creationId xmlns:a16="http://schemas.microsoft.com/office/drawing/2014/main" id="{D2342DB3-A3BC-450A-A44E-7AB45BEDAA47}"/>
               </a:ext>
             </a:extLst>
           </p:cNvPr>
@@ -3935,7 +3935,7 @@
           <p:cNvPr id="14" name="">
             <a:extLst xmlns:a="http://schemas.openxmlformats.org/drawingml/2006/main">
               <a:ext uri="{FF2B5EF4-FFF2-40B4-BE49-F238E27FC236}">
-                <a16:creationId xmlns:a16="http://schemas.microsoft.com/office/drawing/2014/main" id="{AF3175EB-8AF9-49B8-8A34-6C89477114CA}"/>
+                <a16:creationId xmlns:a16="http://schemas.microsoft.com/office/drawing/2014/main" id="{6BF16386-D0BD-4B7C-A019-DB6C6B66EFD9}"/>
               </a:ext>
             </a:extLst>
           </p:cNvPr>
@@ -3992,7 +3992,7 @@
           <p:cNvPr id="15" name="">
             <a:extLst xmlns:a="http://schemas.openxmlformats.org/drawingml/2006/main">
               <a:ext uri="{FF2B5EF4-FFF2-40B4-BE49-F238E27FC236}">
-                <a16:creationId xmlns:a16="http://schemas.microsoft.com/office/drawing/2014/main" id="{C377BDF3-34D0-48FB-9A95-27ECAFA1DDAB}"/>
+                <a16:creationId xmlns:a16="http://schemas.microsoft.com/office/drawing/2014/main" id="{0C69CB62-42AA-4E55-B3FD-CA3964CE452F}"/>
               </a:ext>
             </a:extLst>
           </p:cNvPr>
@@ -4026,7 +4026,7 @@
           <p:cNvPr id="16" name="">
             <a:extLst xmlns:a="http://schemas.openxmlformats.org/drawingml/2006/main">
               <a:ext uri="{FF2B5EF4-FFF2-40B4-BE49-F238E27FC236}">
-                <a16:creationId xmlns:a16="http://schemas.microsoft.com/office/drawing/2014/main" id="{3B645FA2-F262-43B7-BE87-5C3FBF676FA7}"/>
+                <a16:creationId xmlns:a16="http://schemas.microsoft.com/office/drawing/2014/main" id="{A3B101B2-3D26-46DD-A55B-38B73346516E}"/>
               </a:ext>
             </a:extLst>
           </p:cNvPr>
@@ -4083,7 +4083,7 @@
           <p:cNvPr id="17" name="">
             <a:extLst xmlns:a="http://schemas.openxmlformats.org/drawingml/2006/main">
               <a:ext uri="{FF2B5EF4-FFF2-40B4-BE49-F238E27FC236}">
-                <a16:creationId xmlns:a16="http://schemas.microsoft.com/office/drawing/2014/main" id="{D80515B7-CDCD-4045-9570-9E3D0D32B6FD}"/>
+                <a16:creationId xmlns:a16="http://schemas.microsoft.com/office/drawing/2014/main" id="{93E81C0D-7DC4-4CA9-B119-5B23ECD9D853}"/>
               </a:ext>
             </a:extLst>
           </p:cNvPr>
@@ -4140,7 +4140,7 @@
           <p:cNvPr id="18" name="">
             <a:extLst xmlns:a="http://schemas.openxmlformats.org/drawingml/2006/main">
               <a:ext uri="{FF2B5EF4-FFF2-40B4-BE49-F238E27FC236}">
-                <a16:creationId xmlns:a16="http://schemas.microsoft.com/office/drawing/2014/main" id="{9AF47C34-7CCE-4D7D-90D3-76234CD086F5}"/>
+                <a16:creationId xmlns:a16="http://schemas.microsoft.com/office/drawing/2014/main" id="{D88FC8C4-210B-4AF3-B74D-CCCE7AAF3780}"/>
               </a:ext>
             </a:extLst>
           </p:cNvPr>
@@ -4195,7 +4195,7 @@
     </p:spTree>
     <p:extLst>
       <p:ext uri="{BB962C8B-B14F-4D97-AF65-F5344CB8AC3E}">
-        <p14:creationId xmlns:p14="http://schemas.microsoft.com/office/powerpoint/2010/main" val="242846468"/>
+        <p14:creationId xmlns:p14="http://schemas.microsoft.com/office/powerpoint/2010/main" val="1646421056"/>
       </p:ext>
     </p:extLst>
   </p:cSld>
@@ -4350,7 +4350,7 @@
           <p:cNvPr id="23" name="">
             <a:extLst xmlns:a="http://schemas.openxmlformats.org/drawingml/2006/main">
               <a:ext uri="{FF2B5EF4-FFF2-40B4-BE49-F238E27FC236}">
-                <a16:creationId xmlns:a16="http://schemas.microsoft.com/office/drawing/2014/main" id="{B09AC668-D6F5-49EF-822D-ECE567296E2A}"/>
+                <a16:creationId xmlns:a16="http://schemas.microsoft.com/office/drawing/2014/main" id="{75D61A9F-E919-402A-A047-0F3C905DC9C0}"/>
               </a:ext>
             </a:extLst>
           </p:cNvPr>
@@ -4382,7 +4382,7 @@
           <p:cNvPr id="2" name="">
             <a:extLst xmlns:a="http://schemas.openxmlformats.org/drawingml/2006/main">
               <a:ext uri="{FF2B5EF4-FFF2-40B4-BE49-F238E27FC236}">
-                <a16:creationId xmlns:a16="http://schemas.microsoft.com/office/drawing/2014/main" id="{CEDB285B-1D79-4C65-8FE5-1845E776E4A9}"/>
+                <a16:creationId xmlns:a16="http://schemas.microsoft.com/office/drawing/2014/main" id="{BF330BFE-DC55-42FD-9BC8-83A674DEC1AD}"/>
               </a:ext>
             </a:extLst>
           </p:cNvPr>
@@ -4439,7 +4439,7 @@
           <p:cNvPr id="3" name="">
             <a:extLst xmlns:a="http://schemas.openxmlformats.org/drawingml/2006/main">
               <a:ext uri="{FF2B5EF4-FFF2-40B4-BE49-F238E27FC236}">
-                <a16:creationId xmlns:a16="http://schemas.microsoft.com/office/drawing/2014/main" id="{50AD6765-13A9-423D-A68E-E7359BCFE1A1}"/>
+                <a16:creationId xmlns:a16="http://schemas.microsoft.com/office/drawing/2014/main" id="{A3BE6C89-22DC-46D3-B9C7-4203627AC7D2}"/>
               </a:ext>
             </a:extLst>
           </p:cNvPr>
@@ -4471,7 +4471,7 @@
           <p:cNvPr id="4" name="">
             <a:extLst xmlns:a="http://schemas.openxmlformats.org/drawingml/2006/main">
               <a:ext uri="{FF2B5EF4-FFF2-40B4-BE49-F238E27FC236}">
-                <a16:creationId xmlns:a16="http://schemas.microsoft.com/office/drawing/2014/main" id="{1F218390-CF12-4D25-A6BD-88FE4E4B828E}"/>
+                <a16:creationId xmlns:a16="http://schemas.microsoft.com/office/drawing/2014/main" id="{2C44D5F0-8DD2-4836-8743-9F496E99B066}"/>
               </a:ext>
             </a:extLst>
           </p:cNvPr>
@@ -4528,7 +4528,7 @@
           <p:cNvPr id="5" name="">
             <a:extLst xmlns:a="http://schemas.openxmlformats.org/drawingml/2006/main">
               <a:ext uri="{FF2B5EF4-FFF2-40B4-BE49-F238E27FC236}">
-                <a16:creationId xmlns:a16="http://schemas.microsoft.com/office/drawing/2014/main" id="{8AF7F800-F2C3-4817-8E00-CBE737F49A68}"/>
+                <a16:creationId xmlns:a16="http://schemas.microsoft.com/office/drawing/2014/main" id="{268CF171-6E0E-47E9-8F0C-CD61646388DA}"/>
               </a:ext>
             </a:extLst>
           </p:cNvPr>
@@ -4585,7 +4585,7 @@
           <p:cNvPr id="6" name="">
             <a:extLst xmlns:a="http://schemas.openxmlformats.org/drawingml/2006/main">
               <a:ext uri="{FF2B5EF4-FFF2-40B4-BE49-F238E27FC236}">
-                <a16:creationId xmlns:a16="http://schemas.microsoft.com/office/drawing/2014/main" id="{7451AA21-A657-44BF-B2C7-DF10C565258E}"/>
+                <a16:creationId xmlns:a16="http://schemas.microsoft.com/office/drawing/2014/main" id="{1BED21BD-44DE-410F-A050-6CB6E7CD34D1}"/>
               </a:ext>
             </a:extLst>
           </p:cNvPr>
@@ -4642,7 +4642,7 @@
           <p:cNvPr id="7" name="">
             <a:extLst xmlns:a="http://schemas.openxmlformats.org/drawingml/2006/main">
               <a:ext uri="{FF2B5EF4-FFF2-40B4-BE49-F238E27FC236}">
-                <a16:creationId xmlns:a16="http://schemas.microsoft.com/office/drawing/2014/main" id="{4ED54C22-05AC-4B4D-A275-00F68A8CAD21}"/>
+                <a16:creationId xmlns:a16="http://schemas.microsoft.com/office/drawing/2014/main" id="{C0CD78D0-4F68-4F44-A74C-CD30344EAF82}"/>
               </a:ext>
             </a:extLst>
           </p:cNvPr>
@@ -4674,7 +4674,7 @@
           <p:cNvPr id="8" name="">
             <a:extLst xmlns:a="http://schemas.openxmlformats.org/drawingml/2006/main">
               <a:ext uri="{FF2B5EF4-FFF2-40B4-BE49-F238E27FC236}">
-                <a16:creationId xmlns:a16="http://schemas.microsoft.com/office/drawing/2014/main" id="{06CAC451-98BE-4755-87BF-092E068F1588}"/>
+                <a16:creationId xmlns:a16="http://schemas.microsoft.com/office/drawing/2014/main" id="{67CF1B85-EEC7-40FD-9B6C-7E8890651E17}"/>
               </a:ext>
             </a:extLst>
           </p:cNvPr>
@@ -4731,7 +4731,7 @@
           <p:cNvPr id="9" name="">
             <a:extLst xmlns:a="http://schemas.openxmlformats.org/drawingml/2006/main">
               <a:ext uri="{FF2B5EF4-FFF2-40B4-BE49-F238E27FC236}">
-                <a16:creationId xmlns:a16="http://schemas.microsoft.com/office/drawing/2014/main" id="{21F9A52B-640B-4C0E-8C91-8C4156CA8D72}"/>
+                <a16:creationId xmlns:a16="http://schemas.microsoft.com/office/drawing/2014/main" id="{91D84398-F790-4D23-8C32-9354BCB77E11}"/>
               </a:ext>
             </a:extLst>
           </p:cNvPr>
@@ -4788,7 +4788,7 @@
           <p:cNvPr id="10" name="">
             <a:extLst xmlns:a="http://schemas.openxmlformats.org/drawingml/2006/main">
               <a:ext uri="{FF2B5EF4-FFF2-40B4-BE49-F238E27FC236}">
-                <a16:creationId xmlns:a16="http://schemas.microsoft.com/office/drawing/2014/main" id="{CE3EEB9F-CCD7-42AD-9E02-EA12E994E35E}"/>
+                <a16:creationId xmlns:a16="http://schemas.microsoft.com/office/drawing/2014/main" id="{BEFAA283-E874-44B6-B8E2-FC314B86C88C}"/>
               </a:ext>
             </a:extLst>
           </p:cNvPr>
@@ -4822,7 +4822,7 @@
           <p:cNvPr id="11" name="">
             <a:extLst xmlns:a="http://schemas.openxmlformats.org/drawingml/2006/main">
               <a:ext uri="{FF2B5EF4-FFF2-40B4-BE49-F238E27FC236}">
-                <a16:creationId xmlns:a16="http://schemas.microsoft.com/office/drawing/2014/main" id="{40D6499D-67A0-4E52-B7FC-29CEDFE9A3E6}"/>
+                <a16:creationId xmlns:a16="http://schemas.microsoft.com/office/drawing/2014/main" id="{A9454B09-165B-496D-ABDD-A99054352E32}"/>
               </a:ext>
             </a:extLst>
           </p:cNvPr>
@@ -4854,7 +4854,7 @@
           <p:cNvPr id="12" name="">
             <a:extLst xmlns:a="http://schemas.openxmlformats.org/drawingml/2006/main">
               <a:ext uri="{FF2B5EF4-FFF2-40B4-BE49-F238E27FC236}">
-                <a16:creationId xmlns:a16="http://schemas.microsoft.com/office/drawing/2014/main" id="{47230758-6029-4515-B462-35D090C74195}"/>
+                <a16:creationId xmlns:a16="http://schemas.microsoft.com/office/drawing/2014/main" id="{839CDB39-EE3E-4010-8BE6-A8B6D41B0353}"/>
               </a:ext>
             </a:extLst>
           </p:cNvPr>
@@ -4911,7 +4911,7 @@
           <p:cNvPr id="13" name="">
             <a:extLst xmlns:a="http://schemas.openxmlformats.org/drawingml/2006/main">
               <a:ext uri="{FF2B5EF4-FFF2-40B4-BE49-F238E27FC236}">
-                <a16:creationId xmlns:a16="http://schemas.microsoft.com/office/drawing/2014/main" id="{4D47430F-753D-4650-A8C4-456D5D139996}"/>
+                <a16:creationId xmlns:a16="http://schemas.microsoft.com/office/drawing/2014/main" id="{63C198DA-7800-4870-98B2-977B3D75645F}"/>
               </a:ext>
             </a:extLst>
           </p:cNvPr>
@@ -4968,7 +4968,7 @@
           <p:cNvPr id="14" name="">
             <a:extLst xmlns:a="http://schemas.openxmlformats.org/drawingml/2006/main">
               <a:ext uri="{FF2B5EF4-FFF2-40B4-BE49-F238E27FC236}">
-                <a16:creationId xmlns:a16="http://schemas.microsoft.com/office/drawing/2014/main" id="{A508B0FC-FDA1-4340-8088-4A74B02C46FD}"/>
+                <a16:creationId xmlns:a16="http://schemas.microsoft.com/office/drawing/2014/main" id="{FC733BD3-50BE-441E-9450-E78AAAF61753}"/>
               </a:ext>
             </a:extLst>
           </p:cNvPr>
@@ -5002,7 +5002,7 @@
           <p:cNvPr id="15" name="">
             <a:extLst xmlns:a="http://schemas.openxmlformats.org/drawingml/2006/main">
               <a:ext uri="{FF2B5EF4-FFF2-40B4-BE49-F238E27FC236}">
-                <a16:creationId xmlns:a16="http://schemas.microsoft.com/office/drawing/2014/main" id="{4FB69BB1-E64F-4E45-9172-8020C50D4FD2}"/>
+                <a16:creationId xmlns:a16="http://schemas.microsoft.com/office/drawing/2014/main" id="{8C05788C-9A24-451D-8F94-83E13BF43542}"/>
               </a:ext>
             </a:extLst>
           </p:cNvPr>
@@ -5034,7 +5034,7 @@
           <p:cNvPr id="16" name="">
             <a:extLst xmlns:a="http://schemas.openxmlformats.org/drawingml/2006/main">
               <a:ext uri="{FF2B5EF4-FFF2-40B4-BE49-F238E27FC236}">
-                <a16:creationId xmlns:a16="http://schemas.microsoft.com/office/drawing/2014/main" id="{2E70E234-7946-42E0-8C93-5C881FA2AF1E}"/>
+                <a16:creationId xmlns:a16="http://schemas.microsoft.com/office/drawing/2014/main" id="{90AE3943-CFD1-4153-BDD4-82885AF7BC6D}"/>
               </a:ext>
             </a:extLst>
           </p:cNvPr>
@@ -5091,7 +5091,7 @@
           <p:cNvPr id="17" name="">
             <a:extLst xmlns:a="http://schemas.openxmlformats.org/drawingml/2006/main">
               <a:ext uri="{FF2B5EF4-FFF2-40B4-BE49-F238E27FC236}">
-                <a16:creationId xmlns:a16="http://schemas.microsoft.com/office/drawing/2014/main" id="{6222F305-4279-4D52-B296-C6097CCB1A68}"/>
+                <a16:creationId xmlns:a16="http://schemas.microsoft.com/office/drawing/2014/main" id="{D317CD7D-B93A-4C90-BB9B-CED179D312A6}"/>
               </a:ext>
             </a:extLst>
           </p:cNvPr>
@@ -5148,7 +5148,7 @@
           <p:cNvPr id="18" name="">
             <a:extLst xmlns:a="http://schemas.openxmlformats.org/drawingml/2006/main">
               <a:ext uri="{FF2B5EF4-FFF2-40B4-BE49-F238E27FC236}">
-                <a16:creationId xmlns:a16="http://schemas.microsoft.com/office/drawing/2014/main" id="{78040F46-07E6-427D-AB3D-46ECC58987AF}"/>
+                <a16:creationId xmlns:a16="http://schemas.microsoft.com/office/drawing/2014/main" id="{7615BAAF-B718-4A0D-8037-184A9638404A}"/>
               </a:ext>
             </a:extLst>
           </p:cNvPr>
@@ -5182,7 +5182,7 @@
           <p:cNvPr id="19" name="">
             <a:extLst xmlns:a="http://schemas.openxmlformats.org/drawingml/2006/main">
               <a:ext uri="{FF2B5EF4-FFF2-40B4-BE49-F238E27FC236}">
-                <a16:creationId xmlns:a16="http://schemas.microsoft.com/office/drawing/2014/main" id="{1B27DF35-3CE3-48B7-A685-2051C85D2D99}"/>
+                <a16:creationId xmlns:a16="http://schemas.microsoft.com/office/drawing/2014/main" id="{3DFD4563-5D03-4A7C-86EC-43A4A3F68721}"/>
               </a:ext>
             </a:extLst>
           </p:cNvPr>
@@ -5214,7 +5214,7 @@
           <p:cNvPr id="20" name="">
             <a:extLst xmlns:a="http://schemas.openxmlformats.org/drawingml/2006/main">
               <a:ext uri="{FF2B5EF4-FFF2-40B4-BE49-F238E27FC236}">
-                <a16:creationId xmlns:a16="http://schemas.microsoft.com/office/drawing/2014/main" id="{D8B38C2E-7BC6-48EE-8635-55AD6E4CA039}"/>
+                <a16:creationId xmlns:a16="http://schemas.microsoft.com/office/drawing/2014/main" id="{7AB7CE97-7922-4955-AADE-7CFEC8F67BD4}"/>
               </a:ext>
             </a:extLst>
           </p:cNvPr>
@@ -5271,7 +5271,7 @@
           <p:cNvPr id="21" name="">
             <a:extLst xmlns:a="http://schemas.openxmlformats.org/drawingml/2006/main">
               <a:ext uri="{FF2B5EF4-FFF2-40B4-BE49-F238E27FC236}">
-                <a16:creationId xmlns:a16="http://schemas.microsoft.com/office/drawing/2014/main" id="{9DDA661F-8C80-4F09-A305-EAA17579E016}"/>
+                <a16:creationId xmlns:a16="http://schemas.microsoft.com/office/drawing/2014/main" id="{A0492F82-E76B-4BE4-9929-435C2DB6D7E7}"/>
               </a:ext>
             </a:extLst>
           </p:cNvPr>
@@ -5328,7 +5328,7 @@
           <p:cNvPr id="22" name="">
             <a:extLst xmlns:a="http://schemas.openxmlformats.org/drawingml/2006/main">
               <a:ext uri="{FF2B5EF4-FFF2-40B4-BE49-F238E27FC236}">
-                <a16:creationId xmlns:a16="http://schemas.microsoft.com/office/drawing/2014/main" id="{3A18E38D-AE4A-4424-BC1C-9A9012A65BDE}"/>
+                <a16:creationId xmlns:a16="http://schemas.microsoft.com/office/drawing/2014/main" id="{459E3AB6-D763-4BF0-A0D1-44FCEC41B3AA}"/>
               </a:ext>
             </a:extLst>
           </p:cNvPr>
@@ -5383,7 +5383,7 @@
     </p:spTree>
     <p:extLst>
       <p:ext uri="{BB962C8B-B14F-4D97-AF65-F5344CB8AC3E}">
-        <p14:creationId xmlns:p14="http://schemas.microsoft.com/office/powerpoint/2010/main" val="1034063507"/>
+        <p14:creationId xmlns:p14="http://schemas.microsoft.com/office/powerpoint/2010/main" val="1489563958"/>
       </p:ext>
     </p:extLst>
   </p:cSld>
@@ -5584,7 +5584,7 @@
           <p:cNvPr id="23" name="">
             <a:extLst xmlns:a="http://schemas.openxmlformats.org/drawingml/2006/main">
               <a:ext uri="{FF2B5EF4-FFF2-40B4-BE49-F238E27FC236}">
-                <a16:creationId xmlns:a16="http://schemas.microsoft.com/office/drawing/2014/main" id="{73BD6546-5EE5-472F-94A7-425755ECCD26}"/>
+                <a16:creationId xmlns:a16="http://schemas.microsoft.com/office/drawing/2014/main" id="{46C46178-1052-4F61-AEEF-01F48E2BF8F5}"/>
               </a:ext>
             </a:extLst>
           </p:cNvPr>
@@ -5616,7 +5616,7 @@
           <p:cNvPr id="2" name="">
             <a:extLst xmlns:a="http://schemas.openxmlformats.org/drawingml/2006/main">
               <a:ext uri="{FF2B5EF4-FFF2-40B4-BE49-F238E27FC236}">
-                <a16:creationId xmlns:a16="http://schemas.microsoft.com/office/drawing/2014/main" id="{05AAC3E1-2472-413B-9A86-3FF8B43617DB}"/>
+                <a16:creationId xmlns:a16="http://schemas.microsoft.com/office/drawing/2014/main" id="{FA2FC778-3C22-402A-98D8-30CF193CA250}"/>
               </a:ext>
             </a:extLst>
           </p:cNvPr>
@@ -5673,7 +5673,7 @@
           <p:cNvPr id="3" name="">
             <a:extLst xmlns:a="http://schemas.openxmlformats.org/drawingml/2006/main">
               <a:ext uri="{FF2B5EF4-FFF2-40B4-BE49-F238E27FC236}">
-                <a16:creationId xmlns:a16="http://schemas.microsoft.com/office/drawing/2014/main" id="{C3B2BF23-F17E-4117-AF48-68F77225735B}"/>
+                <a16:creationId xmlns:a16="http://schemas.microsoft.com/office/drawing/2014/main" id="{68262A73-6754-4F51-BE53-415F0C8B402D}"/>
               </a:ext>
             </a:extLst>
           </p:cNvPr>
@@ -5705,7 +5705,7 @@
           <p:cNvPr id="4" name="">
             <a:extLst xmlns:a="http://schemas.openxmlformats.org/drawingml/2006/main">
               <a:ext uri="{FF2B5EF4-FFF2-40B4-BE49-F238E27FC236}">
-                <a16:creationId xmlns:a16="http://schemas.microsoft.com/office/drawing/2014/main" id="{79EC61FA-9B6D-4450-B8A6-54563092B07B}"/>
+                <a16:creationId xmlns:a16="http://schemas.microsoft.com/office/drawing/2014/main" id="{7E74B3B4-EA3A-4A01-B99C-88F6625C2D42}"/>
               </a:ext>
             </a:extLst>
           </p:cNvPr>
@@ -5762,7 +5762,7 @@
           <p:cNvPr id="5" name="">
             <a:extLst xmlns:a="http://schemas.openxmlformats.org/drawingml/2006/main">
               <a:ext uri="{FF2B5EF4-FFF2-40B4-BE49-F238E27FC236}">
-                <a16:creationId xmlns:a16="http://schemas.microsoft.com/office/drawing/2014/main" id="{4C9D49B8-279E-44EB-ACB7-8546504CDA9C}"/>
+                <a16:creationId xmlns:a16="http://schemas.microsoft.com/office/drawing/2014/main" id="{DAFB191D-B1EE-4574-8192-7018441A9E10}"/>
               </a:ext>
             </a:extLst>
           </p:cNvPr>
@@ -5819,7 +5819,7 @@
           <p:cNvPr id="6" name="">
             <a:extLst xmlns:a="http://schemas.openxmlformats.org/drawingml/2006/main">
               <a:ext uri="{FF2B5EF4-FFF2-40B4-BE49-F238E27FC236}">
-                <a16:creationId xmlns:a16="http://schemas.microsoft.com/office/drawing/2014/main" id="{A7B04667-AF8C-4FE0-A295-F2065AD28D5E}"/>
+                <a16:creationId xmlns:a16="http://schemas.microsoft.com/office/drawing/2014/main" id="{698D43A1-B30A-4056-8BF5-11E4FBD832AB}"/>
               </a:ext>
             </a:extLst>
           </p:cNvPr>
@@ -5876,7 +5876,7 @@
           <p:cNvPr id="7" name="">
             <a:extLst xmlns:a="http://schemas.openxmlformats.org/drawingml/2006/main">
               <a:ext uri="{FF2B5EF4-FFF2-40B4-BE49-F238E27FC236}">
-                <a16:creationId xmlns:a16="http://schemas.microsoft.com/office/drawing/2014/main" id="{71722636-FEBA-44AC-A638-F70A848B8375}"/>
+                <a16:creationId xmlns:a16="http://schemas.microsoft.com/office/drawing/2014/main" id="{BA5F9213-7770-45E2-ACC1-6C1DAE9DE460}"/>
               </a:ext>
             </a:extLst>
           </p:cNvPr>
@@ -5908,7 +5908,7 @@
           <p:cNvPr id="8" name="">
             <a:extLst xmlns:a="http://schemas.openxmlformats.org/drawingml/2006/main">
               <a:ext uri="{FF2B5EF4-FFF2-40B4-BE49-F238E27FC236}">
-                <a16:creationId xmlns:a16="http://schemas.microsoft.com/office/drawing/2014/main" id="{D937945D-34B7-4C1C-8541-194C5BAAD0D0}"/>
+                <a16:creationId xmlns:a16="http://schemas.microsoft.com/office/drawing/2014/main" id="{ED407F71-3F2A-473A-9CBD-9D458966AF3A}"/>
               </a:ext>
             </a:extLst>
           </p:cNvPr>
@@ -5965,7 +5965,7 @@
           <p:cNvPr id="9" name="">
             <a:extLst xmlns:a="http://schemas.openxmlformats.org/drawingml/2006/main">
               <a:ext uri="{FF2B5EF4-FFF2-40B4-BE49-F238E27FC236}">
-                <a16:creationId xmlns:a16="http://schemas.microsoft.com/office/drawing/2014/main" id="{C737E57E-E3AA-4409-A890-3D47DBED00AE}"/>
+                <a16:creationId xmlns:a16="http://schemas.microsoft.com/office/drawing/2014/main" id="{BFBD6841-4AF3-4F18-A91B-403560EAB282}"/>
               </a:ext>
             </a:extLst>
           </p:cNvPr>
@@ -6022,7 +6022,7 @@
           <p:cNvPr id="10" name="">
             <a:extLst xmlns:a="http://schemas.openxmlformats.org/drawingml/2006/main">
               <a:ext uri="{FF2B5EF4-FFF2-40B4-BE49-F238E27FC236}">
-                <a16:creationId xmlns:a16="http://schemas.microsoft.com/office/drawing/2014/main" id="{33455BB8-1596-45C5-8087-BC7AB5A482A6}"/>
+                <a16:creationId xmlns:a16="http://schemas.microsoft.com/office/drawing/2014/main" id="{A91E2F0F-79AF-4BE4-BDDF-85B3B8B261A0}"/>
               </a:ext>
             </a:extLst>
           </p:cNvPr>
@@ -6056,7 +6056,7 @@
           <p:cNvPr id="11" name="">
             <a:extLst xmlns:a="http://schemas.openxmlformats.org/drawingml/2006/main">
               <a:ext uri="{FF2B5EF4-FFF2-40B4-BE49-F238E27FC236}">
-                <a16:creationId xmlns:a16="http://schemas.microsoft.com/office/drawing/2014/main" id="{EDE4C760-19C3-4C1D-9CB3-605DB181A484}"/>
+                <a16:creationId xmlns:a16="http://schemas.microsoft.com/office/drawing/2014/main" id="{064866D1-9D74-40A5-9366-4BFC3C2302C7}"/>
               </a:ext>
             </a:extLst>
           </p:cNvPr>
@@ -6088,7 +6088,7 @@
           <p:cNvPr id="12" name="">
             <a:extLst xmlns:a="http://schemas.openxmlformats.org/drawingml/2006/main">
               <a:ext uri="{FF2B5EF4-FFF2-40B4-BE49-F238E27FC236}">
-                <a16:creationId xmlns:a16="http://schemas.microsoft.com/office/drawing/2014/main" id="{A4657729-F3D8-4B31-B52F-19F2798FF371}"/>
+                <a16:creationId xmlns:a16="http://schemas.microsoft.com/office/drawing/2014/main" id="{3E1AF47A-2757-4A23-AA22-CA52B553DB76}"/>
               </a:ext>
             </a:extLst>
           </p:cNvPr>
@@ -6145,7 +6145,7 @@
           <p:cNvPr id="13" name="">
             <a:extLst xmlns:a="http://schemas.openxmlformats.org/drawingml/2006/main">
               <a:ext uri="{FF2B5EF4-FFF2-40B4-BE49-F238E27FC236}">
-                <a16:creationId xmlns:a16="http://schemas.microsoft.com/office/drawing/2014/main" id="{1838B873-E7C5-42EC-9C36-A250D5D75CE9}"/>
+                <a16:creationId xmlns:a16="http://schemas.microsoft.com/office/drawing/2014/main" id="{F6A8BCC4-FBD5-4110-946A-2301EAED87E3}"/>
               </a:ext>
             </a:extLst>
           </p:cNvPr>
@@ -6202,7 +6202,7 @@
           <p:cNvPr id="14" name="">
             <a:extLst xmlns:a="http://schemas.openxmlformats.org/drawingml/2006/main">
               <a:ext uri="{FF2B5EF4-FFF2-40B4-BE49-F238E27FC236}">
-                <a16:creationId xmlns:a16="http://schemas.microsoft.com/office/drawing/2014/main" id="{1C0417D4-2A81-466C-B0C2-D11EF83B0465}"/>
+                <a16:creationId xmlns:a16="http://schemas.microsoft.com/office/drawing/2014/main" id="{9659A8D6-3335-4930-97F0-30378F623512}"/>
               </a:ext>
             </a:extLst>
           </p:cNvPr>
@@ -6236,7 +6236,7 @@
           <p:cNvPr id="15" name="">
             <a:extLst xmlns:a="http://schemas.openxmlformats.org/drawingml/2006/main">
               <a:ext uri="{FF2B5EF4-FFF2-40B4-BE49-F238E27FC236}">
-                <a16:creationId xmlns:a16="http://schemas.microsoft.com/office/drawing/2014/main" id="{D60EF73F-46D2-4234-9F57-1D7601C87A01}"/>
+                <a16:creationId xmlns:a16="http://schemas.microsoft.com/office/drawing/2014/main" id="{4BF21B32-45C3-4EBE-8A9A-9B59495C3F4B}"/>
               </a:ext>
             </a:extLst>
           </p:cNvPr>
@@ -6268,7 +6268,7 @@
           <p:cNvPr id="16" name="">
             <a:extLst xmlns:a="http://schemas.openxmlformats.org/drawingml/2006/main">
               <a:ext uri="{FF2B5EF4-FFF2-40B4-BE49-F238E27FC236}">
-                <a16:creationId xmlns:a16="http://schemas.microsoft.com/office/drawing/2014/main" id="{F4BF7788-E705-4103-A2AF-8A8AD465ACC8}"/>
+                <a16:creationId xmlns:a16="http://schemas.microsoft.com/office/drawing/2014/main" id="{702A6A81-30AA-4C31-BA33-26020879CD0F}"/>
               </a:ext>
             </a:extLst>
           </p:cNvPr>
@@ -6325,7 +6325,7 @@
           <p:cNvPr id="17" name="">
             <a:extLst xmlns:a="http://schemas.openxmlformats.org/drawingml/2006/main">
               <a:ext uri="{FF2B5EF4-FFF2-40B4-BE49-F238E27FC236}">
-                <a16:creationId xmlns:a16="http://schemas.microsoft.com/office/drawing/2014/main" id="{3D0F2B92-5494-4A22-87B6-3815A8ECD646}"/>
+                <a16:creationId xmlns:a16="http://schemas.microsoft.com/office/drawing/2014/main" id="{2D872DDD-6F5A-471C-ACE1-5B40924691E3}"/>
               </a:ext>
             </a:extLst>
           </p:cNvPr>
@@ -6382,7 +6382,7 @@
           <p:cNvPr id="18" name="">
             <a:extLst xmlns:a="http://schemas.openxmlformats.org/drawingml/2006/main">
               <a:ext uri="{FF2B5EF4-FFF2-40B4-BE49-F238E27FC236}">
-                <a16:creationId xmlns:a16="http://schemas.microsoft.com/office/drawing/2014/main" id="{CE043275-623E-44F0-9F71-EFC17FEBB013}"/>
+                <a16:creationId xmlns:a16="http://schemas.microsoft.com/office/drawing/2014/main" id="{EEA090A4-22E8-4DBC-9696-89BEA3849FA0}"/>
               </a:ext>
             </a:extLst>
           </p:cNvPr>
@@ -6416,7 +6416,7 @@
           <p:cNvPr id="19" name="">
             <a:extLst xmlns:a="http://schemas.openxmlformats.org/drawingml/2006/main">
               <a:ext uri="{FF2B5EF4-FFF2-40B4-BE49-F238E27FC236}">
-                <a16:creationId xmlns:a16="http://schemas.microsoft.com/office/drawing/2014/main" id="{FA7F1E6A-60A5-41A3-967E-CA5A83386A1E}"/>
+                <a16:creationId xmlns:a16="http://schemas.microsoft.com/office/drawing/2014/main" id="{FF55EE66-0E9A-4C5A-8621-10C1DDA7F983}"/>
               </a:ext>
             </a:extLst>
           </p:cNvPr>
@@ -6448,7 +6448,7 @@
           <p:cNvPr id="20" name="">
             <a:extLst xmlns:a="http://schemas.openxmlformats.org/drawingml/2006/main">
               <a:ext uri="{FF2B5EF4-FFF2-40B4-BE49-F238E27FC236}">
-                <a16:creationId xmlns:a16="http://schemas.microsoft.com/office/drawing/2014/main" id="{D8936805-C7D1-4F58-87E4-86442B6DB4CA}"/>
+                <a16:creationId xmlns:a16="http://schemas.microsoft.com/office/drawing/2014/main" id="{096DCEB8-53FD-4687-A601-C4E46E85EC33}"/>
               </a:ext>
             </a:extLst>
           </p:cNvPr>
@@ -6505,7 +6505,7 @@
           <p:cNvPr id="21" name="">
             <a:extLst xmlns:a="http://schemas.openxmlformats.org/drawingml/2006/main">
               <a:ext uri="{FF2B5EF4-FFF2-40B4-BE49-F238E27FC236}">
-                <a16:creationId xmlns:a16="http://schemas.microsoft.com/office/drawing/2014/main" id="{94F175F2-6074-4485-A5D9-2E3108A1A0BD}"/>
+                <a16:creationId xmlns:a16="http://schemas.microsoft.com/office/drawing/2014/main" id="{2F9C901F-8C9A-4F22-BB04-33704241486A}"/>
               </a:ext>
             </a:extLst>
           </p:cNvPr>
@@ -6562,7 +6562,7 @@
           <p:cNvPr id="22" name="">
             <a:extLst xmlns:a="http://schemas.openxmlformats.org/drawingml/2006/main">
               <a:ext uri="{FF2B5EF4-FFF2-40B4-BE49-F238E27FC236}">
-                <a16:creationId xmlns:a16="http://schemas.microsoft.com/office/drawing/2014/main" id="{7507EBB8-F7E4-4391-9FD9-0D4AD44CA1BE}"/>
+                <a16:creationId xmlns:a16="http://schemas.microsoft.com/office/drawing/2014/main" id="{F300D549-A8C5-41B4-8221-17EEDDA76DF6}"/>
               </a:ext>
             </a:extLst>
           </p:cNvPr>
@@ -6617,7 +6617,7 @@
     </p:spTree>
     <p:extLst>
       <p:ext uri="{BB962C8B-B14F-4D97-AF65-F5344CB8AC3E}">
-        <p14:creationId xmlns:p14="http://schemas.microsoft.com/office/powerpoint/2010/main" val="315261176"/>
+        <p14:creationId xmlns:p14="http://schemas.microsoft.com/office/powerpoint/2010/main" val="1177484536"/>
       </p:ext>
     </p:extLst>
   </p:cSld>
@@ -6818,7 +6818,7 @@
           <p:cNvPr id="16" name="">
             <a:extLst xmlns:a="http://schemas.openxmlformats.org/drawingml/2006/main">
               <a:ext uri="{FF2B5EF4-FFF2-40B4-BE49-F238E27FC236}">
-                <a16:creationId xmlns:a16="http://schemas.microsoft.com/office/drawing/2014/main" id="{AA3B5C3F-321C-4D0B-91B1-6EA398213716}"/>
+                <a16:creationId xmlns:a16="http://schemas.microsoft.com/office/drawing/2014/main" id="{6FE0151E-A9FA-4759-A3F5-3E881B61390C}"/>
               </a:ext>
             </a:extLst>
           </p:cNvPr>
@@ -6850,7 +6850,7 @@
           <p:cNvPr id="2" name="">
             <a:extLst xmlns:a="http://schemas.openxmlformats.org/drawingml/2006/main">
               <a:ext uri="{FF2B5EF4-FFF2-40B4-BE49-F238E27FC236}">
-                <a16:creationId xmlns:a16="http://schemas.microsoft.com/office/drawing/2014/main" id="{0D7B6173-B188-440C-B4CD-3AAE0C9470F9}"/>
+                <a16:creationId xmlns:a16="http://schemas.microsoft.com/office/drawing/2014/main" id="{3D564C9C-C6AC-48C1-BC66-C5D140110A88}"/>
               </a:ext>
             </a:extLst>
           </p:cNvPr>
@@ -6907,7 +6907,7 @@
           <p:cNvPr id="3" name="">
             <a:extLst xmlns:a="http://schemas.openxmlformats.org/drawingml/2006/main">
               <a:ext uri="{FF2B5EF4-FFF2-40B4-BE49-F238E27FC236}">
-                <a16:creationId xmlns:a16="http://schemas.microsoft.com/office/drawing/2014/main" id="{30CA4BBE-BD25-442E-98A5-31E0F62838EE}"/>
+                <a16:creationId xmlns:a16="http://schemas.microsoft.com/office/drawing/2014/main" id="{75999B4C-2783-4213-9058-37A25EED449B}"/>
               </a:ext>
             </a:extLst>
           </p:cNvPr>
@@ -6939,7 +6939,7 @@
           <p:cNvPr id="4" name="">
             <a:extLst xmlns:a="http://schemas.openxmlformats.org/drawingml/2006/main">
               <a:ext uri="{FF2B5EF4-FFF2-40B4-BE49-F238E27FC236}">
-                <a16:creationId xmlns:a16="http://schemas.microsoft.com/office/drawing/2014/main" id="{DC7B6E61-FD59-4C83-9018-1EABA5549AA4}"/>
+                <a16:creationId xmlns:a16="http://schemas.microsoft.com/office/drawing/2014/main" id="{90A3FB9D-E5C6-4FAC-8B10-A8779B2E4D34}"/>
               </a:ext>
             </a:extLst>
           </p:cNvPr>
@@ -6996,7 +6996,7 @@
           <p:cNvPr id="5" name="">
             <a:extLst xmlns:a="http://schemas.openxmlformats.org/drawingml/2006/main">
               <a:ext uri="{FF2B5EF4-FFF2-40B4-BE49-F238E27FC236}">
-                <a16:creationId xmlns:a16="http://schemas.microsoft.com/office/drawing/2014/main" id="{05C6CA0B-6339-4A57-A56E-9C798602D406}"/>
+                <a16:creationId xmlns:a16="http://schemas.microsoft.com/office/drawing/2014/main" id="{2C0A8482-5D58-48D9-883C-21988986C846}"/>
               </a:ext>
             </a:extLst>
           </p:cNvPr>
@@ -7053,7 +7053,7 @@
           <p:cNvPr id="6" name="">
             <a:extLst xmlns:a="http://schemas.openxmlformats.org/drawingml/2006/main">
               <a:ext uri="{FF2B5EF4-FFF2-40B4-BE49-F238E27FC236}">
-                <a16:creationId xmlns:a16="http://schemas.microsoft.com/office/drawing/2014/main" id="{F31CC912-A5C1-4F6C-A57B-7DC2EB04692A}"/>
+                <a16:creationId xmlns:a16="http://schemas.microsoft.com/office/drawing/2014/main" id="{0798DBCE-EF4C-4A9F-AE31-0750DE33CA40}"/>
               </a:ext>
             </a:extLst>
           </p:cNvPr>
@@ -7110,7 +7110,7 @@
           <p:cNvPr id="7" name="">
             <a:extLst xmlns:a="http://schemas.openxmlformats.org/drawingml/2006/main">
               <a:ext uri="{FF2B5EF4-FFF2-40B4-BE49-F238E27FC236}">
-                <a16:creationId xmlns:a16="http://schemas.microsoft.com/office/drawing/2014/main" id="{29F4036B-2051-48C9-8474-23DCBF238665}"/>
+                <a16:creationId xmlns:a16="http://schemas.microsoft.com/office/drawing/2014/main" id="{CA504AD2-2303-4510-AC22-051CDD8E571B}"/>
               </a:ext>
             </a:extLst>
           </p:cNvPr>
@@ -7142,7 +7142,7 @@
           <p:cNvPr id="8" name="">
             <a:extLst xmlns:a="http://schemas.openxmlformats.org/drawingml/2006/main">
               <a:ext uri="{FF2B5EF4-FFF2-40B4-BE49-F238E27FC236}">
-                <a16:creationId xmlns:a16="http://schemas.microsoft.com/office/drawing/2014/main" id="{BFD3D5B0-6A3E-49EB-BD0A-1AEFB08774FF}"/>
+                <a16:creationId xmlns:a16="http://schemas.microsoft.com/office/drawing/2014/main" id="{A0010EEB-272A-4708-B3BC-E99334D73753}"/>
               </a:ext>
             </a:extLst>
           </p:cNvPr>
@@ -7199,7 +7199,7 @@
           <p:cNvPr id="9" name="">
             <a:extLst xmlns:a="http://schemas.openxmlformats.org/drawingml/2006/main">
               <a:ext uri="{FF2B5EF4-FFF2-40B4-BE49-F238E27FC236}">
-                <a16:creationId xmlns:a16="http://schemas.microsoft.com/office/drawing/2014/main" id="{808201A8-B437-4480-89B7-51F752730E05}"/>
+                <a16:creationId xmlns:a16="http://schemas.microsoft.com/office/drawing/2014/main" id="{AE6CC085-B3B5-4D08-AAC6-3732C9A342CE}"/>
               </a:ext>
             </a:extLst>
           </p:cNvPr>
@@ -7256,7 +7256,7 @@
           <p:cNvPr id="10" name="">
             <a:extLst xmlns:a="http://schemas.openxmlformats.org/drawingml/2006/main">
               <a:ext uri="{FF2B5EF4-FFF2-40B4-BE49-F238E27FC236}">
-                <a16:creationId xmlns:a16="http://schemas.microsoft.com/office/drawing/2014/main" id="{6FF3AA47-81B1-4BB2-800F-E789830F8FAF}"/>
+                <a16:creationId xmlns:a16="http://schemas.microsoft.com/office/drawing/2014/main" id="{245E324C-4B65-4DEC-9B19-4BBA107C756E}"/>
               </a:ext>
             </a:extLst>
           </p:cNvPr>
@@ -7313,7 +7313,7 @@
           <p:cNvPr id="11" name="">
             <a:extLst xmlns:a="http://schemas.openxmlformats.org/drawingml/2006/main">
               <a:ext uri="{FF2B5EF4-FFF2-40B4-BE49-F238E27FC236}">
-                <a16:creationId xmlns:a16="http://schemas.microsoft.com/office/drawing/2014/main" id="{B2D7609F-4556-4151-99A7-040809A46A37}"/>
+                <a16:creationId xmlns:a16="http://schemas.microsoft.com/office/drawing/2014/main" id="{418A3AA7-F111-4A81-AA0D-EE8B05139FCF}"/>
               </a:ext>
             </a:extLst>
           </p:cNvPr>
@@ -7345,7 +7345,7 @@
           <p:cNvPr id="12" name="">
             <a:extLst xmlns:a="http://schemas.openxmlformats.org/drawingml/2006/main">
               <a:ext uri="{FF2B5EF4-FFF2-40B4-BE49-F238E27FC236}">
-                <a16:creationId xmlns:a16="http://schemas.microsoft.com/office/drawing/2014/main" id="{F3459A9B-8094-428E-8D8D-D649390A818E}"/>
+                <a16:creationId xmlns:a16="http://schemas.microsoft.com/office/drawing/2014/main" id="{D9CC9974-CBBF-4B94-BAB1-58B0E46C7AC0}"/>
               </a:ext>
             </a:extLst>
           </p:cNvPr>
@@ -7402,7 +7402,7 @@
           <p:cNvPr id="13" name="">
             <a:extLst xmlns:a="http://schemas.openxmlformats.org/drawingml/2006/main">
               <a:ext uri="{FF2B5EF4-FFF2-40B4-BE49-F238E27FC236}">
-                <a16:creationId xmlns:a16="http://schemas.microsoft.com/office/drawing/2014/main" id="{A1981329-B474-4823-9849-4C35EB888282}"/>
+                <a16:creationId xmlns:a16="http://schemas.microsoft.com/office/drawing/2014/main" id="{C7372367-065A-4252-A517-044BF05A2E3C}"/>
               </a:ext>
             </a:extLst>
           </p:cNvPr>
@@ -7459,7 +7459,7 @@
           <p:cNvPr id="14" name="">
             <a:extLst xmlns:a="http://schemas.openxmlformats.org/drawingml/2006/main">
               <a:ext uri="{FF2B5EF4-FFF2-40B4-BE49-F238E27FC236}">
-                <a16:creationId xmlns:a16="http://schemas.microsoft.com/office/drawing/2014/main" id="{BE2C0452-A5E5-4CE6-A1B7-CA205216145F}"/>
+                <a16:creationId xmlns:a16="http://schemas.microsoft.com/office/drawing/2014/main" id="{51FBE700-8E33-4614-AC96-25FDA90E0FBD}"/>
               </a:ext>
             </a:extLst>
           </p:cNvPr>
@@ -7516,7 +7516,7 @@
           <p:cNvPr id="15" name="">
             <a:extLst xmlns:a="http://schemas.openxmlformats.org/drawingml/2006/main">
               <a:ext uri="{FF2B5EF4-FFF2-40B4-BE49-F238E27FC236}">
-                <a16:creationId xmlns:a16="http://schemas.microsoft.com/office/drawing/2014/main" id="{F9EA7C2C-8BF5-49AB-ACC6-F1D9AF06B183}"/>
+                <a16:creationId xmlns:a16="http://schemas.microsoft.com/office/drawing/2014/main" id="{918E23EC-F063-40E5-AF6E-6825D9061922}"/>
               </a:ext>
             </a:extLst>
           </p:cNvPr>
@@ -7571,7 +7571,7 @@
     </p:spTree>
     <p:extLst>
       <p:ext uri="{BB962C8B-B14F-4D97-AF65-F5344CB8AC3E}">
-        <p14:creationId xmlns:p14="http://schemas.microsoft.com/office/powerpoint/2010/main" val="242172040"/>
+        <p14:creationId xmlns:p14="http://schemas.microsoft.com/office/powerpoint/2010/main" val="1766075924"/>
       </p:ext>
     </p:extLst>
   </p:cSld>
@@ -7772,7 +7772,7 @@
           <p:cNvPr id="23" name="">
             <a:extLst xmlns:a="http://schemas.openxmlformats.org/drawingml/2006/main">
               <a:ext uri="{FF2B5EF4-FFF2-40B4-BE49-F238E27FC236}">
-                <a16:creationId xmlns:a16="http://schemas.microsoft.com/office/drawing/2014/main" id="{EC1FBAE2-7C10-45E1-B471-67BE0A4FC669}"/>
+                <a16:creationId xmlns:a16="http://schemas.microsoft.com/office/drawing/2014/main" id="{C95C4718-D625-4919-BBD9-6DDD321A3780}"/>
               </a:ext>
             </a:extLst>
           </p:cNvPr>
@@ -7804,7 +7804,7 @@
           <p:cNvPr id="2" name="">
             <a:extLst xmlns:a="http://schemas.openxmlformats.org/drawingml/2006/main">
               <a:ext uri="{FF2B5EF4-FFF2-40B4-BE49-F238E27FC236}">
-                <a16:creationId xmlns:a16="http://schemas.microsoft.com/office/drawing/2014/main" id="{77B533B0-4B6D-4832-B103-0E57D589C698}"/>
+                <a16:creationId xmlns:a16="http://schemas.microsoft.com/office/drawing/2014/main" id="{B5A179DF-8FA2-4BC9-A7CE-E715C88058BC}"/>
               </a:ext>
             </a:extLst>
           </p:cNvPr>
@@ -7861,7 +7861,7 @@
           <p:cNvPr id="3" name="">
             <a:extLst xmlns:a="http://schemas.openxmlformats.org/drawingml/2006/main">
               <a:ext uri="{FF2B5EF4-FFF2-40B4-BE49-F238E27FC236}">
-                <a16:creationId xmlns:a16="http://schemas.microsoft.com/office/drawing/2014/main" id="{AC17E30E-ADCF-41B3-BF35-62EF340A93EA}"/>
+                <a16:creationId xmlns:a16="http://schemas.microsoft.com/office/drawing/2014/main" id="{E98B109C-6D60-4521-8AFA-80E3A5994E23}"/>
               </a:ext>
             </a:extLst>
           </p:cNvPr>
@@ -7893,7 +7893,7 @@
           <p:cNvPr id="4" name="">
             <a:extLst xmlns:a="http://schemas.openxmlformats.org/drawingml/2006/main">
               <a:ext uri="{FF2B5EF4-FFF2-40B4-BE49-F238E27FC236}">
-                <a16:creationId xmlns:a16="http://schemas.microsoft.com/office/drawing/2014/main" id="{68C94F92-9E2F-4791-8BC2-590C544EF44B}"/>
+                <a16:creationId xmlns:a16="http://schemas.microsoft.com/office/drawing/2014/main" id="{6A306E52-F9BC-4480-8EC6-93CC999B741B}"/>
               </a:ext>
             </a:extLst>
           </p:cNvPr>
@@ -7950,7 +7950,7 @@
           <p:cNvPr id="5" name="">
             <a:extLst xmlns:a="http://schemas.openxmlformats.org/drawingml/2006/main">
               <a:ext uri="{FF2B5EF4-FFF2-40B4-BE49-F238E27FC236}">
-                <a16:creationId xmlns:a16="http://schemas.microsoft.com/office/drawing/2014/main" id="{93EB1D49-25B8-4556-8502-731CD54D4D48}"/>
+                <a16:creationId xmlns:a16="http://schemas.microsoft.com/office/drawing/2014/main" id="{ACD1D2A8-ACF9-4827-A31E-FE6502BA6AA9}"/>
               </a:ext>
             </a:extLst>
           </p:cNvPr>
@@ -8007,7 +8007,7 @@
           <p:cNvPr id="6" name="">
             <a:extLst xmlns:a="http://schemas.openxmlformats.org/drawingml/2006/main">
               <a:ext uri="{FF2B5EF4-FFF2-40B4-BE49-F238E27FC236}">
-                <a16:creationId xmlns:a16="http://schemas.microsoft.com/office/drawing/2014/main" id="{1C9EBEFE-042B-476F-B7E4-65A52643689B}"/>
+                <a16:creationId xmlns:a16="http://schemas.microsoft.com/office/drawing/2014/main" id="{D4369800-F8C9-4DBF-9A73-4BD6D9C934CD}"/>
               </a:ext>
             </a:extLst>
           </p:cNvPr>
@@ -8064,7 +8064,7 @@
           <p:cNvPr id="7" name="">
             <a:extLst xmlns:a="http://schemas.openxmlformats.org/drawingml/2006/main">
               <a:ext uri="{FF2B5EF4-FFF2-40B4-BE49-F238E27FC236}">
-                <a16:creationId xmlns:a16="http://schemas.microsoft.com/office/drawing/2014/main" id="{09D9AD0A-B3C7-495F-9C9E-6127D0280700}"/>
+                <a16:creationId xmlns:a16="http://schemas.microsoft.com/office/drawing/2014/main" id="{7DDA6F92-A10C-41A8-8857-39BD4FB8E231}"/>
               </a:ext>
             </a:extLst>
           </p:cNvPr>
@@ -8096,7 +8096,7 @@
           <p:cNvPr id="8" name="">
             <a:extLst xmlns:a="http://schemas.openxmlformats.org/drawingml/2006/main">
               <a:ext uri="{FF2B5EF4-FFF2-40B4-BE49-F238E27FC236}">
-                <a16:creationId xmlns:a16="http://schemas.microsoft.com/office/drawing/2014/main" id="{FB587D93-17E3-43A2-BB02-55439259C406}"/>
+                <a16:creationId xmlns:a16="http://schemas.microsoft.com/office/drawing/2014/main" id="{35B17D23-4BC2-4879-9466-D94A8EB3D12B}"/>
               </a:ext>
             </a:extLst>
           </p:cNvPr>
@@ -8153,7 +8153,7 @@
           <p:cNvPr id="9" name="">
             <a:extLst xmlns:a="http://schemas.openxmlformats.org/drawingml/2006/main">
               <a:ext uri="{FF2B5EF4-FFF2-40B4-BE49-F238E27FC236}">
-                <a16:creationId xmlns:a16="http://schemas.microsoft.com/office/drawing/2014/main" id="{7D10F946-E8E5-4B61-9C25-973C080E9DF1}"/>
+                <a16:creationId xmlns:a16="http://schemas.microsoft.com/office/drawing/2014/main" id="{9A9D98FF-1B41-4696-94F5-9129EFBD1D57}"/>
               </a:ext>
             </a:extLst>
           </p:cNvPr>
@@ -8210,19 +8210,19 @@
           <p:cNvPr id="10" name="">
             <a:extLst xmlns:a="http://schemas.openxmlformats.org/drawingml/2006/main">
               <a:ext uri="{FF2B5EF4-FFF2-40B4-BE49-F238E27FC236}">
-                <a16:creationId xmlns:a16="http://schemas.microsoft.com/office/drawing/2014/main" id="{E289C2DB-D3FD-420E-B370-7BE6640376D2}"/>
-              </a:ext>
-            </a:extLst>
-          </p:cNvPr>
-          <p:cNvSpPr>
-            <a:spLocks xmlns:a="http://schemas.openxmlformats.org/drawingml/2006/main" noGrp="1"/>
-          </p:cNvSpPr>
-          <p:nvPr/>
-        </p:nvSpPr>
-        <p:spPr>
-          <a:xfrm xmlns:a="http://schemas.openxmlformats.org/drawingml/2006/main">
-            <a:off x="914400" y="1257300"/>
-            <a:ext cx="10363200" cy="781050"/>
+                <a16:creationId xmlns:a16="http://schemas.microsoft.com/office/drawing/2014/main" id="{00F5E0C5-9CF5-4F03-8CFE-E4E1D1AC6F7B}"/>
+              </a:ext>
+            </a:extLst>
+          </p:cNvPr>
+          <p:cNvSpPr>
+            <a:spLocks xmlns:a="http://schemas.openxmlformats.org/drawingml/2006/main" noGrp="1"/>
+          </p:cNvSpPr>
+          <p:nvPr/>
+        </p:nvSpPr>
+        <p:spPr>
+          <a:xfrm xmlns:a="http://schemas.openxmlformats.org/drawingml/2006/main">
+            <a:off x="857250" y="1219200"/>
+            <a:ext cx="10477500" cy="742950"/>
           </a:xfrm>
           <a:prstGeom xmlns:a="http://schemas.openxmlformats.org/drawingml/2006/main" prst="rect">
             <a:avLst/>
@@ -8239,7 +8239,7 @@
           <a:lstStyle xmlns:a="http://schemas.openxmlformats.org/drawingml/2006/main"/>
           <a:p xmlns:a="http://schemas.openxmlformats.org/drawingml/2006/main">
             <a:pPr algn="ctr">
-              <a:defRPr sz="2175" b="1">
+              <a:defRPr sz="2100" b="1">
                 <a:solidFill>
                   <a:srgbClr val="17253A"/>
                 </a:solidFill>
@@ -8249,7 +8249,7 @@
               </a:defRPr>
             </a:pPr>
             <a:r>
-              <a:rPr sz="2175" b="1">
+              <a:rPr sz="2100" b="1">
                 <a:solidFill>
                   <a:srgbClr val="17253A"/>
                 </a:solidFill>
@@ -8267,28 +8267,30 @@
           <p:cNvPr id="11" name="">
             <a:extLst xmlns:a="http://schemas.openxmlformats.org/drawingml/2006/main">
               <a:ext uri="{FF2B5EF4-FFF2-40B4-BE49-F238E27FC236}">
-                <a16:creationId xmlns:a16="http://schemas.microsoft.com/office/drawing/2014/main" id="{1E428CCF-C03C-40CD-9027-ED062ECDAA86}"/>
-              </a:ext>
-            </a:extLst>
-          </p:cNvPr>
-          <p:cNvSpPr>
-            <a:spLocks xmlns:a="http://schemas.openxmlformats.org/drawingml/2006/main" noGrp="1"/>
-          </p:cNvSpPr>
-          <p:nvPr/>
-        </p:nvSpPr>
-        <p:spPr>
-          <a:xfrm xmlns:a="http://schemas.openxmlformats.org/drawingml/2006/main">
-            <a:off x="1000125" y="2247900"/>
-            <a:ext cx="476250" cy="476250"/>
-          </a:xfrm>
-          <a:prstGeom xmlns:a="http://schemas.openxmlformats.org/drawingml/2006/main" prst="ellipse">
+                <a16:creationId xmlns:a16="http://schemas.microsoft.com/office/drawing/2014/main" id="{D04A5A2C-90B0-4880-A5BC-21652BD6E54A}"/>
+              </a:ext>
+            </a:extLst>
+          </p:cNvPr>
+          <p:cNvSpPr>
+            <a:spLocks xmlns:a="http://schemas.openxmlformats.org/drawingml/2006/main" noGrp="1"/>
+          </p:cNvSpPr>
+          <p:nvPr/>
+        </p:nvSpPr>
+        <p:spPr>
+          <a:xfrm xmlns:a="http://schemas.openxmlformats.org/drawingml/2006/main">
+            <a:off x="971550" y="2124075"/>
+            <a:ext cx="38100" cy="3524250"/>
+          </a:xfrm>
+          <a:prstGeom xmlns:a="http://schemas.openxmlformats.org/drawingml/2006/main" prst="rect">
             <a:avLst/>
           </a:prstGeom>
           <a:solidFill xmlns:a="http://schemas.openxmlformats.org/drawingml/2006/main">
-            <a:srgbClr val="18324A"/>
+            <a:srgbClr val="2C6E73"/>
           </a:solidFill>
           <a:ln xmlns:a="http://schemas.openxmlformats.org/drawingml/2006/main" w="0">
-            <a:noFill/>
+            <a:solidFill>
+              <a:srgbClr val="2C6E73"/>
+            </a:solidFill>
           </a:ln>
         </p:spPr>
       </p:sp>
@@ -8297,19 +8299,19 @@
           <p:cNvPr id="12" name="">
             <a:extLst xmlns:a="http://schemas.openxmlformats.org/drawingml/2006/main">
               <a:ext uri="{FF2B5EF4-FFF2-40B4-BE49-F238E27FC236}">
-                <a16:creationId xmlns:a16="http://schemas.microsoft.com/office/drawing/2014/main" id="{1CD743A2-CA21-4542-BABF-AC27525294BC}"/>
-              </a:ext>
-            </a:extLst>
-          </p:cNvPr>
-          <p:cNvSpPr>
-            <a:spLocks xmlns:a="http://schemas.openxmlformats.org/drawingml/2006/main" noGrp="1"/>
-          </p:cNvSpPr>
-          <p:nvPr/>
-        </p:nvSpPr>
-        <p:spPr>
-          <a:xfrm xmlns:a="http://schemas.openxmlformats.org/drawingml/2006/main">
-            <a:off x="1000125" y="2276475"/>
-            <a:ext cx="476250" cy="419100"/>
+                <a16:creationId xmlns:a16="http://schemas.microsoft.com/office/drawing/2014/main" id="{F78BE7FA-8DCA-4AB6-A5C8-C1D18A20A5D6}"/>
+              </a:ext>
+            </a:extLst>
+          </p:cNvPr>
+          <p:cNvSpPr>
+            <a:spLocks xmlns:a="http://schemas.openxmlformats.org/drawingml/2006/main" noGrp="1"/>
+          </p:cNvSpPr>
+          <p:nvPr/>
+        </p:nvSpPr>
+        <p:spPr>
+          <a:xfrm xmlns:a="http://schemas.openxmlformats.org/drawingml/2006/main">
+            <a:off x="1162050" y="2200275"/>
+            <a:ext cx="400050" cy="400050"/>
           </a:xfrm>
           <a:prstGeom xmlns:a="http://schemas.openxmlformats.org/drawingml/2006/main" prst="rect">
             <a:avLst/>
@@ -8326,9 +8328,9 @@
           <a:lstStyle xmlns:a="http://schemas.openxmlformats.org/drawingml/2006/main"/>
           <a:p xmlns:a="http://schemas.openxmlformats.org/drawingml/2006/main">
             <a:pPr algn="ctr">
-              <a:defRPr sz="1350" b="1">
-                <a:solidFill>
-                  <a:srgbClr val="FFFFFF"/>
+              <a:defRPr sz="1125" b="1">
+                <a:solidFill>
+                  <a:srgbClr val="2C6E73"/>
                 </a:solidFill>
                 <a:latin typeface="Arial"/>
                 <a:ea typeface="Arial"/>
@@ -8336,9 +8338,9 @@
               </a:defRPr>
             </a:pPr>
             <a:r>
-              <a:rPr sz="1350" b="1">
-                <a:solidFill>
-                  <a:srgbClr val="FFFFFF"/>
+              <a:rPr sz="1125" b="1">
+                <a:solidFill>
+                  <a:srgbClr val="2C6E73"/>
                 </a:solidFill>
                 <a:latin typeface="Arial"/>
                 <a:ea typeface="Arial"/>
@@ -8354,19 +8356,19 @@
           <p:cNvPr id="13" name="">
             <a:extLst xmlns:a="http://schemas.openxmlformats.org/drawingml/2006/main">
               <a:ext uri="{FF2B5EF4-FFF2-40B4-BE49-F238E27FC236}">
-                <a16:creationId xmlns:a16="http://schemas.microsoft.com/office/drawing/2014/main" id="{C05066F7-9BBF-441D-83C1-2A9723AF3D22}"/>
-              </a:ext>
-            </a:extLst>
-          </p:cNvPr>
-          <p:cNvSpPr>
-            <a:spLocks xmlns:a="http://schemas.openxmlformats.org/drawingml/2006/main" noGrp="1"/>
-          </p:cNvSpPr>
-          <p:nvPr/>
-        </p:nvSpPr>
-        <p:spPr>
-          <a:xfrm xmlns:a="http://schemas.openxmlformats.org/drawingml/2006/main">
-            <a:off x="1714500" y="2181225"/>
-            <a:ext cx="9429750" cy="609600"/>
+                <a16:creationId xmlns:a16="http://schemas.microsoft.com/office/drawing/2014/main" id="{9D75178C-1502-4FE8-BEE6-D73527BA21DD}"/>
+              </a:ext>
+            </a:extLst>
+          </p:cNvPr>
+          <p:cNvSpPr>
+            <a:spLocks xmlns:a="http://schemas.openxmlformats.org/drawingml/2006/main" noGrp="1"/>
+          </p:cNvSpPr>
+          <p:nvPr/>
+        </p:nvSpPr>
+        <p:spPr>
+          <a:xfrm xmlns:a="http://schemas.openxmlformats.org/drawingml/2006/main">
+            <a:off x="1714500" y="2114550"/>
+            <a:ext cx="9525000" cy="809625"/>
           </a:xfrm>
           <a:prstGeom xmlns:a="http://schemas.openxmlformats.org/drawingml/2006/main" prst="rect">
             <a:avLst/>
@@ -8383,7 +8385,7 @@
           <a:lstStyle xmlns:a="http://schemas.openxmlformats.org/drawingml/2006/main"/>
           <a:p xmlns:a="http://schemas.openxmlformats.org/drawingml/2006/main">
             <a:pPr algn="l">
-              <a:defRPr sz="1500" b="0">
+              <a:defRPr sz="1725" b="0">
                 <a:solidFill>
                   <a:srgbClr val="17253A"/>
                 </a:solidFill>
@@ -8393,7 +8395,7 @@
               </a:defRPr>
             </a:pPr>
             <a:r>
-              <a:rPr sz="1500" b="0">
+              <a:rPr sz="1725" b="0">
                 <a:solidFill>
                   <a:srgbClr val="17253A"/>
                 </a:solidFill>
@@ -8401,7 +8403,7 @@
                 <a:ea typeface="Arial"/>
                 <a:cs typeface="Arial"/>
               </a:rPr>
-              <a:t>Identify the structure: Read or record x before y and note the quadrant.</a:t>
+              <a:t>Start (-6, 2)</a:t>
             </a:r>
           </a:p>
         </p:txBody>
@@ -8411,28 +8413,30 @@
           <p:cNvPr id="14" name="">
             <a:extLst xmlns:a="http://schemas.openxmlformats.org/drawingml/2006/main">
               <a:ext uri="{FF2B5EF4-FFF2-40B4-BE49-F238E27FC236}">
-                <a16:creationId xmlns:a16="http://schemas.microsoft.com/office/drawing/2014/main" id="{D037D9AB-460A-45C0-B143-05A06E023D75}"/>
-              </a:ext>
-            </a:extLst>
-          </p:cNvPr>
-          <p:cNvSpPr>
-            <a:spLocks xmlns:a="http://schemas.openxmlformats.org/drawingml/2006/main" noGrp="1"/>
-          </p:cNvSpPr>
-          <p:nvPr/>
-        </p:nvSpPr>
-        <p:spPr>
-          <a:xfrm xmlns:a="http://schemas.openxmlformats.org/drawingml/2006/main">
-            <a:off x="1000125" y="2990850"/>
-            <a:ext cx="476250" cy="476250"/>
-          </a:xfrm>
-          <a:prstGeom xmlns:a="http://schemas.openxmlformats.org/drawingml/2006/main" prst="ellipse">
+                <a16:creationId xmlns:a16="http://schemas.microsoft.com/office/drawing/2014/main" id="{2D9F5140-F0D1-47E2-B4EA-23E57EFFA243}"/>
+              </a:ext>
+            </a:extLst>
+          </p:cNvPr>
+          <p:cNvSpPr>
+            <a:spLocks xmlns:a="http://schemas.openxmlformats.org/drawingml/2006/main" noGrp="1"/>
+          </p:cNvSpPr>
+          <p:nvPr/>
+        </p:nvSpPr>
+        <p:spPr>
+          <a:xfrm xmlns:a="http://schemas.openxmlformats.org/drawingml/2006/main">
+            <a:off x="1714500" y="2943225"/>
+            <a:ext cx="9334500" cy="9525"/>
+          </a:xfrm>
+          <a:prstGeom xmlns:a="http://schemas.openxmlformats.org/drawingml/2006/main" prst="rect">
             <a:avLst/>
           </a:prstGeom>
           <a:solidFill xmlns:a="http://schemas.openxmlformats.org/drawingml/2006/main">
-            <a:srgbClr val="2C6E73"/>
+            <a:srgbClr val="D9E0E6"/>
           </a:solidFill>
           <a:ln xmlns:a="http://schemas.openxmlformats.org/drawingml/2006/main" w="0">
-            <a:noFill/>
+            <a:solidFill>
+              <a:srgbClr val="D9E0E6"/>
+            </a:solidFill>
           </a:ln>
         </p:spPr>
       </p:sp>
@@ -8441,19 +8445,19 @@
           <p:cNvPr id="15" name="">
             <a:extLst xmlns:a="http://schemas.openxmlformats.org/drawingml/2006/main">
               <a:ext uri="{FF2B5EF4-FFF2-40B4-BE49-F238E27FC236}">
-                <a16:creationId xmlns:a16="http://schemas.microsoft.com/office/drawing/2014/main" id="{4AC28755-1F03-4870-8EDF-01B7A06D7B62}"/>
-              </a:ext>
-            </a:extLst>
-          </p:cNvPr>
-          <p:cNvSpPr>
-            <a:spLocks xmlns:a="http://schemas.openxmlformats.org/drawingml/2006/main" noGrp="1"/>
-          </p:cNvSpPr>
-          <p:nvPr/>
-        </p:nvSpPr>
-        <p:spPr>
-          <a:xfrm xmlns:a="http://schemas.openxmlformats.org/drawingml/2006/main">
-            <a:off x="1000125" y="3019425"/>
-            <a:ext cx="476250" cy="419100"/>
+                <a16:creationId xmlns:a16="http://schemas.microsoft.com/office/drawing/2014/main" id="{31AA4011-DDFC-4173-AE1B-C08C817A3A58}"/>
+              </a:ext>
+            </a:extLst>
+          </p:cNvPr>
+          <p:cNvSpPr>
+            <a:spLocks xmlns:a="http://schemas.openxmlformats.org/drawingml/2006/main" noGrp="1"/>
+          </p:cNvSpPr>
+          <p:nvPr/>
+        </p:nvSpPr>
+        <p:spPr>
+          <a:xfrm xmlns:a="http://schemas.openxmlformats.org/drawingml/2006/main">
+            <a:off x="1162050" y="3076575"/>
+            <a:ext cx="400050" cy="400050"/>
           </a:xfrm>
           <a:prstGeom xmlns:a="http://schemas.openxmlformats.org/drawingml/2006/main" prst="rect">
             <a:avLst/>
@@ -8470,9 +8474,9 @@
           <a:lstStyle xmlns:a="http://schemas.openxmlformats.org/drawingml/2006/main"/>
           <a:p xmlns:a="http://schemas.openxmlformats.org/drawingml/2006/main">
             <a:pPr algn="ctr">
-              <a:defRPr sz="1350" b="1">
-                <a:solidFill>
-                  <a:srgbClr val="FFFFFF"/>
+              <a:defRPr sz="1125" b="1">
+                <a:solidFill>
+                  <a:srgbClr val="2C6E73"/>
                 </a:solidFill>
                 <a:latin typeface="Arial"/>
                 <a:ea typeface="Arial"/>
@@ -8480,9 +8484,9 @@
               </a:defRPr>
             </a:pPr>
             <a:r>
-              <a:rPr sz="1350" b="1">
-                <a:solidFill>
-                  <a:srgbClr val="FFFFFF"/>
+              <a:rPr sz="1125" b="1">
+                <a:solidFill>
+                  <a:srgbClr val="2C6E73"/>
                 </a:solidFill>
                 <a:latin typeface="Arial"/>
                 <a:ea typeface="Arial"/>
@@ -8498,19 +8502,19 @@
           <p:cNvPr id="16" name="">
             <a:extLst xmlns:a="http://schemas.openxmlformats.org/drawingml/2006/main">
               <a:ext uri="{FF2B5EF4-FFF2-40B4-BE49-F238E27FC236}">
-                <a16:creationId xmlns:a16="http://schemas.microsoft.com/office/drawing/2014/main" id="{2023D1FE-6A7B-4C1A-AAB3-F4711EF857F7}"/>
-              </a:ext>
-            </a:extLst>
-          </p:cNvPr>
-          <p:cNvSpPr>
-            <a:spLocks xmlns:a="http://schemas.openxmlformats.org/drawingml/2006/main" noGrp="1"/>
-          </p:cNvSpPr>
-          <p:nvPr/>
-        </p:nvSpPr>
-        <p:spPr>
-          <a:xfrm xmlns:a="http://schemas.openxmlformats.org/drawingml/2006/main">
-            <a:off x="1714500" y="2924175"/>
-            <a:ext cx="9429750" cy="609600"/>
+                <a16:creationId xmlns:a16="http://schemas.microsoft.com/office/drawing/2014/main" id="{BFEEFBED-3B13-4BE0-BA7D-85C8F25EF2B2}"/>
+              </a:ext>
+            </a:extLst>
+          </p:cNvPr>
+          <p:cNvSpPr>
+            <a:spLocks xmlns:a="http://schemas.openxmlformats.org/drawingml/2006/main" noGrp="1"/>
+          </p:cNvSpPr>
+          <p:nvPr/>
+        </p:nvSpPr>
+        <p:spPr>
+          <a:xfrm xmlns:a="http://schemas.openxmlformats.org/drawingml/2006/main">
+            <a:off x="1714500" y="2990850"/>
+            <a:ext cx="9525000" cy="809625"/>
           </a:xfrm>
           <a:prstGeom xmlns:a="http://schemas.openxmlformats.org/drawingml/2006/main" prst="rect">
             <a:avLst/>
@@ -8527,7 +8531,7 @@
           <a:lstStyle xmlns:a="http://schemas.openxmlformats.org/drawingml/2006/main"/>
           <a:p xmlns:a="http://schemas.openxmlformats.org/drawingml/2006/main">
             <a:pPr algn="l">
-              <a:defRPr sz="1500" b="0">
+              <a:defRPr sz="1725" b="0">
                 <a:solidFill>
                   <a:srgbClr val="17253A"/>
                 </a:solidFill>
@@ -8537,7 +8541,7 @@
               </a:defRPr>
             </a:pPr>
             <a:r>
-              <a:rPr sz="1500" b="0">
+              <a:rPr sz="1725" b="0">
                 <a:solidFill>
                   <a:srgbClr val="17253A"/>
                 </a:solidFill>
@@ -8545,7 +8549,7 @@
                 <a:ea typeface="Arial"/>
                 <a:cs typeface="Arial"/>
               </a:rPr>
-              <a:t>Set up the method: Apply the same vector or mirror line to every vertex.</a:t>
+              <a:t>Reflection in y-axis changes the sign of x</a:t>
             </a:r>
           </a:p>
         </p:txBody>
@@ -8555,28 +8559,30 @@
           <p:cNvPr id="17" name="">
             <a:extLst xmlns:a="http://schemas.openxmlformats.org/drawingml/2006/main">
               <a:ext uri="{FF2B5EF4-FFF2-40B4-BE49-F238E27FC236}">
-                <a16:creationId xmlns:a16="http://schemas.microsoft.com/office/drawing/2014/main" id="{6249B637-A93A-46F0-B5B4-5DBFA0877CD1}"/>
-              </a:ext>
-            </a:extLst>
-          </p:cNvPr>
-          <p:cNvSpPr>
-            <a:spLocks xmlns:a="http://schemas.openxmlformats.org/drawingml/2006/main" noGrp="1"/>
-          </p:cNvSpPr>
-          <p:nvPr/>
-        </p:nvSpPr>
-        <p:spPr>
-          <a:xfrm xmlns:a="http://schemas.openxmlformats.org/drawingml/2006/main">
-            <a:off x="1000125" y="3733800"/>
-            <a:ext cx="476250" cy="476250"/>
-          </a:xfrm>
-          <a:prstGeom xmlns:a="http://schemas.openxmlformats.org/drawingml/2006/main" prst="ellipse">
+                <a16:creationId xmlns:a16="http://schemas.microsoft.com/office/drawing/2014/main" id="{C19E67DC-120F-4296-8589-F0E56BA67022}"/>
+              </a:ext>
+            </a:extLst>
+          </p:cNvPr>
+          <p:cNvSpPr>
+            <a:spLocks xmlns:a="http://schemas.openxmlformats.org/drawingml/2006/main" noGrp="1"/>
+          </p:cNvSpPr>
+          <p:nvPr/>
+        </p:nvSpPr>
+        <p:spPr>
+          <a:xfrm xmlns:a="http://schemas.openxmlformats.org/drawingml/2006/main">
+            <a:off x="1714500" y="3819525"/>
+            <a:ext cx="9334500" cy="9525"/>
+          </a:xfrm>
+          <a:prstGeom xmlns:a="http://schemas.openxmlformats.org/drawingml/2006/main" prst="rect">
             <a:avLst/>
           </a:prstGeom>
           <a:solidFill xmlns:a="http://schemas.openxmlformats.org/drawingml/2006/main">
-            <a:srgbClr val="2C6E73"/>
+            <a:srgbClr val="D9E0E6"/>
           </a:solidFill>
           <a:ln xmlns:a="http://schemas.openxmlformats.org/drawingml/2006/main" w="0">
-            <a:noFill/>
+            <a:solidFill>
+              <a:srgbClr val="D9E0E6"/>
+            </a:solidFill>
           </a:ln>
         </p:spPr>
       </p:sp>
@@ -8585,19 +8591,19 @@
           <p:cNvPr id="18" name="">
             <a:extLst xmlns:a="http://schemas.openxmlformats.org/drawingml/2006/main">
               <a:ext uri="{FF2B5EF4-FFF2-40B4-BE49-F238E27FC236}">
-                <a16:creationId xmlns:a16="http://schemas.microsoft.com/office/drawing/2014/main" id="{2D5F03F5-81F8-45E8-858F-7CDC8DD93330}"/>
-              </a:ext>
-            </a:extLst>
-          </p:cNvPr>
-          <p:cNvSpPr>
-            <a:spLocks xmlns:a="http://schemas.openxmlformats.org/drawingml/2006/main" noGrp="1"/>
-          </p:cNvSpPr>
-          <p:nvPr/>
-        </p:nvSpPr>
-        <p:spPr>
-          <a:xfrm xmlns:a="http://schemas.openxmlformats.org/drawingml/2006/main">
-            <a:off x="1000125" y="3762375"/>
-            <a:ext cx="476250" cy="419100"/>
+                <a16:creationId xmlns:a16="http://schemas.microsoft.com/office/drawing/2014/main" id="{864855BB-B860-4EDF-BCEC-93E57FB98C76}"/>
+              </a:ext>
+            </a:extLst>
+          </p:cNvPr>
+          <p:cNvSpPr>
+            <a:spLocks xmlns:a="http://schemas.openxmlformats.org/drawingml/2006/main" noGrp="1"/>
+          </p:cNvSpPr>
+          <p:nvPr/>
+        </p:nvSpPr>
+        <p:spPr>
+          <a:xfrm xmlns:a="http://schemas.openxmlformats.org/drawingml/2006/main">
+            <a:off x="1162050" y="3952875"/>
+            <a:ext cx="400050" cy="400050"/>
           </a:xfrm>
           <a:prstGeom xmlns:a="http://schemas.openxmlformats.org/drawingml/2006/main" prst="rect">
             <a:avLst/>
@@ -8614,9 +8620,9 @@
           <a:lstStyle xmlns:a="http://schemas.openxmlformats.org/drawingml/2006/main"/>
           <a:p xmlns:a="http://schemas.openxmlformats.org/drawingml/2006/main">
             <a:pPr algn="ctr">
-              <a:defRPr sz="1350" b="1">
-                <a:solidFill>
-                  <a:srgbClr val="FFFFFF"/>
+              <a:defRPr sz="1125" b="1">
+                <a:solidFill>
+                  <a:srgbClr val="2C6E73"/>
                 </a:solidFill>
                 <a:latin typeface="Arial"/>
                 <a:ea typeface="Arial"/>
@@ -8624,9 +8630,9 @@
               </a:defRPr>
             </a:pPr>
             <a:r>
-              <a:rPr sz="1350" b="1">
-                <a:solidFill>
-                  <a:srgbClr val="FFFFFF"/>
+              <a:rPr sz="1125" b="1">
+                <a:solidFill>
+                  <a:srgbClr val="2C6E73"/>
                 </a:solidFill>
                 <a:latin typeface="Arial"/>
                 <a:ea typeface="Arial"/>
@@ -8642,19 +8648,19 @@
           <p:cNvPr id="19" name="">
             <a:extLst xmlns:a="http://schemas.openxmlformats.org/drawingml/2006/main">
               <a:ext uri="{FF2B5EF4-FFF2-40B4-BE49-F238E27FC236}">
-                <a16:creationId xmlns:a16="http://schemas.microsoft.com/office/drawing/2014/main" id="{4484ABEC-502D-48F9-A1DC-3805D808C71C}"/>
-              </a:ext>
-            </a:extLst>
-          </p:cNvPr>
-          <p:cNvSpPr>
-            <a:spLocks xmlns:a="http://schemas.openxmlformats.org/drawingml/2006/main" noGrp="1"/>
-          </p:cNvSpPr>
-          <p:nvPr/>
-        </p:nvSpPr>
-        <p:spPr>
-          <a:xfrm xmlns:a="http://schemas.openxmlformats.org/drawingml/2006/main">
-            <a:off x="1714500" y="3667125"/>
-            <a:ext cx="9429750" cy="609600"/>
+                <a16:creationId xmlns:a16="http://schemas.microsoft.com/office/drawing/2014/main" id="{614175DC-23E8-4098-80EC-2A8440E514E5}"/>
+              </a:ext>
+            </a:extLst>
+          </p:cNvPr>
+          <p:cNvSpPr>
+            <a:spLocks xmlns:a="http://schemas.openxmlformats.org/drawingml/2006/main" noGrp="1"/>
+          </p:cNvSpPr>
+          <p:nvPr/>
+        </p:nvSpPr>
+        <p:spPr>
+          <a:xfrm xmlns:a="http://schemas.openxmlformats.org/drawingml/2006/main">
+            <a:off x="1714500" y="3867150"/>
+            <a:ext cx="9525000" cy="809625"/>
           </a:xfrm>
           <a:prstGeom xmlns:a="http://schemas.openxmlformats.org/drawingml/2006/main" prst="rect">
             <a:avLst/>
@@ -8671,7 +8677,7 @@
           <a:lstStyle xmlns:a="http://schemas.openxmlformats.org/drawingml/2006/main"/>
           <a:p xmlns:a="http://schemas.openxmlformats.org/drawingml/2006/main">
             <a:pPr algn="l">
-              <a:defRPr sz="1500" b="0">
+              <a:defRPr sz="1725" b="0">
                 <a:solidFill>
                   <a:srgbClr val="17253A"/>
                 </a:solidFill>
@@ -8681,7 +8687,7 @@
               </a:defRPr>
             </a:pPr>
             <a:r>
-              <a:rPr sz="1500" b="0">
+              <a:rPr sz="1725" b="0">
                 <a:solidFill>
                   <a:srgbClr val="17253A"/>
                 </a:solidFill>
@@ -8689,7 +8695,7 @@
                 <a:ea typeface="Arial"/>
                 <a:cs typeface="Arial"/>
               </a:rPr>
-              <a:t>Complete the calculation: (6, 2).</a:t>
+              <a:t>(-6, 2) → (6, 2)</a:t>
             </a:r>
           </a:p>
         </p:txBody>
@@ -8699,28 +8705,30 @@
           <p:cNvPr id="20" name="">
             <a:extLst xmlns:a="http://schemas.openxmlformats.org/drawingml/2006/main">
               <a:ext uri="{FF2B5EF4-FFF2-40B4-BE49-F238E27FC236}">
-                <a16:creationId xmlns:a16="http://schemas.microsoft.com/office/drawing/2014/main" id="{261FDDFF-8BF4-45C2-A8C8-302DAE802278}"/>
-              </a:ext>
-            </a:extLst>
-          </p:cNvPr>
-          <p:cNvSpPr>
-            <a:spLocks xmlns:a="http://schemas.openxmlformats.org/drawingml/2006/main" noGrp="1"/>
-          </p:cNvSpPr>
-          <p:nvPr/>
-        </p:nvSpPr>
-        <p:spPr>
-          <a:xfrm xmlns:a="http://schemas.openxmlformats.org/drawingml/2006/main">
-            <a:off x="1000125" y="4476750"/>
-            <a:ext cx="476250" cy="476250"/>
-          </a:xfrm>
-          <a:prstGeom xmlns:a="http://schemas.openxmlformats.org/drawingml/2006/main" prst="ellipse">
+                <a16:creationId xmlns:a16="http://schemas.microsoft.com/office/drawing/2014/main" id="{37594316-1991-4FFF-9457-0BCDC4EC2370}"/>
+              </a:ext>
+            </a:extLst>
+          </p:cNvPr>
+          <p:cNvSpPr>
+            <a:spLocks xmlns:a="http://schemas.openxmlformats.org/drawingml/2006/main" noGrp="1"/>
+          </p:cNvSpPr>
+          <p:nvPr/>
+        </p:nvSpPr>
+        <p:spPr>
+          <a:xfrm xmlns:a="http://schemas.openxmlformats.org/drawingml/2006/main">
+            <a:off x="1714500" y="4695825"/>
+            <a:ext cx="9334500" cy="9525"/>
+          </a:xfrm>
+          <a:prstGeom xmlns:a="http://schemas.openxmlformats.org/drawingml/2006/main" prst="rect">
             <a:avLst/>
           </a:prstGeom>
           <a:solidFill xmlns:a="http://schemas.openxmlformats.org/drawingml/2006/main">
-            <a:srgbClr val="2C6E73"/>
+            <a:srgbClr val="D9E0E6"/>
           </a:solidFill>
           <a:ln xmlns:a="http://schemas.openxmlformats.org/drawingml/2006/main" w="0">
-            <a:noFill/>
+            <a:solidFill>
+              <a:srgbClr val="D9E0E6"/>
+            </a:solidFill>
           </a:ln>
         </p:spPr>
       </p:sp>
@@ -8729,19 +8737,19 @@
           <p:cNvPr id="21" name="">
             <a:extLst xmlns:a="http://schemas.openxmlformats.org/drawingml/2006/main">
               <a:ext uri="{FF2B5EF4-FFF2-40B4-BE49-F238E27FC236}">
-                <a16:creationId xmlns:a16="http://schemas.microsoft.com/office/drawing/2014/main" id="{CC0D642A-8AE0-45DA-B700-B6F71A42E036}"/>
-              </a:ext>
-            </a:extLst>
-          </p:cNvPr>
-          <p:cNvSpPr>
-            <a:spLocks xmlns:a="http://schemas.openxmlformats.org/drawingml/2006/main" noGrp="1"/>
-          </p:cNvSpPr>
-          <p:nvPr/>
-        </p:nvSpPr>
-        <p:spPr>
-          <a:xfrm xmlns:a="http://schemas.openxmlformats.org/drawingml/2006/main">
-            <a:off x="1000125" y="4505325"/>
-            <a:ext cx="476250" cy="419100"/>
+                <a16:creationId xmlns:a16="http://schemas.microsoft.com/office/drawing/2014/main" id="{8FD3F31D-9F62-40CE-9B44-F9CD6818A0D8}"/>
+              </a:ext>
+            </a:extLst>
+          </p:cNvPr>
+          <p:cNvSpPr>
+            <a:spLocks xmlns:a="http://schemas.openxmlformats.org/drawingml/2006/main" noGrp="1"/>
+          </p:cNvSpPr>
+          <p:nvPr/>
+        </p:nvSpPr>
+        <p:spPr>
+          <a:xfrm xmlns:a="http://schemas.openxmlformats.org/drawingml/2006/main">
+            <a:off x="1162050" y="4829175"/>
+            <a:ext cx="400050" cy="400050"/>
           </a:xfrm>
           <a:prstGeom xmlns:a="http://schemas.openxmlformats.org/drawingml/2006/main" prst="rect">
             <a:avLst/>
@@ -8758,9 +8766,9 @@
           <a:lstStyle xmlns:a="http://schemas.openxmlformats.org/drawingml/2006/main"/>
           <a:p xmlns:a="http://schemas.openxmlformats.org/drawingml/2006/main">
             <a:pPr algn="ctr">
-              <a:defRPr sz="1350" b="1">
-                <a:solidFill>
-                  <a:srgbClr val="FFFFFF"/>
+              <a:defRPr sz="1125" b="1">
+                <a:solidFill>
+                  <a:srgbClr val="2F785D"/>
                 </a:solidFill>
                 <a:latin typeface="Arial"/>
                 <a:ea typeface="Arial"/>
@@ -8768,9 +8776,9 @@
               </a:defRPr>
             </a:pPr>
             <a:r>
-              <a:rPr sz="1350" b="1">
-                <a:solidFill>
-                  <a:srgbClr val="FFFFFF"/>
+              <a:rPr sz="1125" b="1">
+                <a:solidFill>
+                  <a:srgbClr val="2F785D"/>
                 </a:solidFill>
                 <a:latin typeface="Arial"/>
                 <a:ea typeface="Arial"/>
@@ -8786,19 +8794,19 @@
           <p:cNvPr id="22" name="">
             <a:extLst xmlns:a="http://schemas.openxmlformats.org/drawingml/2006/main">
               <a:ext uri="{FF2B5EF4-FFF2-40B4-BE49-F238E27FC236}">
-                <a16:creationId xmlns:a16="http://schemas.microsoft.com/office/drawing/2014/main" id="{1F0699CF-1837-49C1-994B-DFAE885D1D27}"/>
-              </a:ext>
-            </a:extLst>
-          </p:cNvPr>
-          <p:cNvSpPr>
-            <a:spLocks xmlns:a="http://schemas.openxmlformats.org/drawingml/2006/main" noGrp="1"/>
-          </p:cNvSpPr>
-          <p:nvPr/>
-        </p:nvSpPr>
-        <p:spPr>
-          <a:xfrm xmlns:a="http://schemas.openxmlformats.org/drawingml/2006/main">
-            <a:off x="1714500" y="4410075"/>
-            <a:ext cx="9429750" cy="609600"/>
+                <a16:creationId xmlns:a16="http://schemas.microsoft.com/office/drawing/2014/main" id="{BAAFF164-98D0-4FAA-AAEF-94E90F5394DD}"/>
+              </a:ext>
+            </a:extLst>
+          </p:cNvPr>
+          <p:cNvSpPr>
+            <a:spLocks xmlns:a="http://schemas.openxmlformats.org/drawingml/2006/main" noGrp="1"/>
+          </p:cNvSpPr>
+          <p:nvPr/>
+        </p:nvSpPr>
+        <p:spPr>
+          <a:xfrm xmlns:a="http://schemas.openxmlformats.org/drawingml/2006/main">
+            <a:off x="1714500" y="4743450"/>
+            <a:ext cx="9525000" cy="809625"/>
           </a:xfrm>
           <a:prstGeom xmlns:a="http://schemas.openxmlformats.org/drawingml/2006/main" prst="rect">
             <a:avLst/>
@@ -8815,7 +8823,7 @@
           <a:lstStyle xmlns:a="http://schemas.openxmlformats.org/drawingml/2006/main"/>
           <a:p xmlns:a="http://schemas.openxmlformats.org/drawingml/2006/main">
             <a:pPr algn="l">
-              <a:defRPr sz="1500" b="1">
+              <a:defRPr sz="1725" b="1">
                 <a:solidFill>
                   <a:srgbClr val="2F785D"/>
                 </a:solidFill>
@@ -8825,7 +8833,7 @@
               </a:defRPr>
             </a:pPr>
             <a:r>
-              <a:rPr sz="1500" b="1">
+              <a:rPr sz="1725" b="1">
                 <a:solidFill>
                   <a:srgbClr val="2F785D"/>
                 </a:solidFill>
@@ -8833,7 +8841,7 @@
                 <a:ea typeface="Arial"/>
                 <a:cs typeface="Arial"/>
               </a:rPr>
-              <a:t>Check the result: Check side lengths and orientation after the transformation.</a:t>
+              <a:t>Image point = (6, 2)</a:t>
             </a:r>
           </a:p>
         </p:txBody>
@@ -8841,7 +8849,7 @@
     </p:spTree>
     <p:extLst>
       <p:ext uri="{BB962C8B-B14F-4D97-AF65-F5344CB8AC3E}">
-        <p14:creationId xmlns:p14="http://schemas.microsoft.com/office/powerpoint/2010/main" val="1149672456"/>
+        <p14:creationId xmlns:p14="http://schemas.microsoft.com/office/powerpoint/2010/main" val="389291127"/>
       </p:ext>
     </p:extLst>
   </p:cSld>
@@ -9134,7 +9142,7 @@
           <p:cNvPr id="15" name="">
             <a:extLst xmlns:a="http://schemas.openxmlformats.org/drawingml/2006/main">
               <a:ext uri="{FF2B5EF4-FFF2-40B4-BE49-F238E27FC236}">
-                <a16:creationId xmlns:a16="http://schemas.microsoft.com/office/drawing/2014/main" id="{37C44842-76DB-46B7-BBFF-D471279AA9B5}"/>
+                <a16:creationId xmlns:a16="http://schemas.microsoft.com/office/drawing/2014/main" id="{F41F449A-3CF3-477E-A571-A51107435E94}"/>
               </a:ext>
             </a:extLst>
           </p:cNvPr>
@@ -9166,7 +9174,7 @@
           <p:cNvPr id="2" name="">
             <a:extLst xmlns:a="http://schemas.openxmlformats.org/drawingml/2006/main">
               <a:ext uri="{FF2B5EF4-FFF2-40B4-BE49-F238E27FC236}">
-                <a16:creationId xmlns:a16="http://schemas.microsoft.com/office/drawing/2014/main" id="{06119D1C-2C2C-4F60-B66A-3C6A5A14B2A6}"/>
+                <a16:creationId xmlns:a16="http://schemas.microsoft.com/office/drawing/2014/main" id="{FBA9A3E8-D08A-4E39-965B-F5FC170177B2}"/>
               </a:ext>
             </a:extLst>
           </p:cNvPr>
@@ -9223,7 +9231,7 @@
           <p:cNvPr id="3" name="">
             <a:extLst xmlns:a="http://schemas.openxmlformats.org/drawingml/2006/main">
               <a:ext uri="{FF2B5EF4-FFF2-40B4-BE49-F238E27FC236}">
-                <a16:creationId xmlns:a16="http://schemas.microsoft.com/office/drawing/2014/main" id="{50D15C1D-FBA0-48CA-87AB-04DBCEEF38BC}"/>
+                <a16:creationId xmlns:a16="http://schemas.microsoft.com/office/drawing/2014/main" id="{10A43975-41CC-4B6E-A217-1C1D8334E5A2}"/>
               </a:ext>
             </a:extLst>
           </p:cNvPr>
@@ -9255,7 +9263,7 @@
           <p:cNvPr id="4" name="">
             <a:extLst xmlns:a="http://schemas.openxmlformats.org/drawingml/2006/main">
               <a:ext uri="{FF2B5EF4-FFF2-40B4-BE49-F238E27FC236}">
-                <a16:creationId xmlns:a16="http://schemas.microsoft.com/office/drawing/2014/main" id="{9E878248-0B4D-45D8-AD02-74E76276D7B8}"/>
+                <a16:creationId xmlns:a16="http://schemas.microsoft.com/office/drawing/2014/main" id="{FE6BD902-42EE-41AD-9E15-4B704938A011}"/>
               </a:ext>
             </a:extLst>
           </p:cNvPr>
@@ -9312,7 +9320,7 @@
           <p:cNvPr id="5" name="">
             <a:extLst xmlns:a="http://schemas.openxmlformats.org/drawingml/2006/main">
               <a:ext uri="{FF2B5EF4-FFF2-40B4-BE49-F238E27FC236}">
-                <a16:creationId xmlns:a16="http://schemas.microsoft.com/office/drawing/2014/main" id="{84CA2EC9-66B4-45FE-897D-45567C543ED9}"/>
+                <a16:creationId xmlns:a16="http://schemas.microsoft.com/office/drawing/2014/main" id="{514F935B-AAA7-4FF0-A968-5EAD66723F3C}"/>
               </a:ext>
             </a:extLst>
           </p:cNvPr>
@@ -9369,7 +9377,7 @@
           <p:cNvPr id="6" name="">
             <a:extLst xmlns:a="http://schemas.openxmlformats.org/drawingml/2006/main">
               <a:ext uri="{FF2B5EF4-FFF2-40B4-BE49-F238E27FC236}">
-                <a16:creationId xmlns:a16="http://schemas.microsoft.com/office/drawing/2014/main" id="{CFAB11E0-FD44-42F9-9EBC-10E59F2BD7A1}"/>
+                <a16:creationId xmlns:a16="http://schemas.microsoft.com/office/drawing/2014/main" id="{12A0BBE1-2069-4377-B902-0C2850279ECD}"/>
               </a:ext>
             </a:extLst>
           </p:cNvPr>
@@ -9426,7 +9434,7 @@
           <p:cNvPr id="7" name="">
             <a:extLst xmlns:a="http://schemas.openxmlformats.org/drawingml/2006/main">
               <a:ext uri="{FF2B5EF4-FFF2-40B4-BE49-F238E27FC236}">
-                <a16:creationId xmlns:a16="http://schemas.microsoft.com/office/drawing/2014/main" id="{DBBD6CEC-DE41-46C2-BDB0-39EB3B966611}"/>
+                <a16:creationId xmlns:a16="http://schemas.microsoft.com/office/drawing/2014/main" id="{4C43D3DD-1164-4163-9DDD-681EBD21CB07}"/>
               </a:ext>
             </a:extLst>
           </p:cNvPr>
@@ -9458,7 +9466,7 @@
           <p:cNvPr id="8" name="">
             <a:extLst xmlns:a="http://schemas.openxmlformats.org/drawingml/2006/main">
               <a:ext uri="{FF2B5EF4-FFF2-40B4-BE49-F238E27FC236}">
-                <a16:creationId xmlns:a16="http://schemas.microsoft.com/office/drawing/2014/main" id="{068DD961-32D8-445B-8745-964885AA9898}"/>
+                <a16:creationId xmlns:a16="http://schemas.microsoft.com/office/drawing/2014/main" id="{7F66CFA5-5813-4B4B-A09D-509C22D8929D}"/>
               </a:ext>
             </a:extLst>
           </p:cNvPr>
@@ -9515,7 +9523,7 @@
           <p:cNvPr id="9" name="">
             <a:extLst xmlns:a="http://schemas.openxmlformats.org/drawingml/2006/main">
               <a:ext uri="{FF2B5EF4-FFF2-40B4-BE49-F238E27FC236}">
-                <a16:creationId xmlns:a16="http://schemas.microsoft.com/office/drawing/2014/main" id="{46DA5AE1-E015-4526-800D-23D4D48DDF77}"/>
+                <a16:creationId xmlns:a16="http://schemas.microsoft.com/office/drawing/2014/main" id="{EC35BBDD-32EB-4AE5-A849-4E433A74D59B}"/>
               </a:ext>
             </a:extLst>
           </p:cNvPr>
@@ -9572,7 +9580,7 @@
           <p:cNvPr id="10" name="">
             <a:extLst xmlns:a="http://schemas.openxmlformats.org/drawingml/2006/main">
               <a:ext uri="{FF2B5EF4-FFF2-40B4-BE49-F238E27FC236}">
-                <a16:creationId xmlns:a16="http://schemas.microsoft.com/office/drawing/2014/main" id="{6D544E0E-9B19-48C8-B3CF-1BDAAEBA269B}"/>
+                <a16:creationId xmlns:a16="http://schemas.microsoft.com/office/drawing/2014/main" id="{015F5FD9-7D97-43F6-B9F4-D233FB99C42E}"/>
               </a:ext>
             </a:extLst>
           </p:cNvPr>
@@ -9629,7 +9637,7 @@
           <p:cNvPr id="11" name="">
             <a:extLst xmlns:a="http://schemas.openxmlformats.org/drawingml/2006/main">
               <a:ext uri="{FF2B5EF4-FFF2-40B4-BE49-F238E27FC236}">
-                <a16:creationId xmlns:a16="http://schemas.microsoft.com/office/drawing/2014/main" id="{F3E001A9-BBA1-4014-803C-92706AD48102}"/>
+                <a16:creationId xmlns:a16="http://schemas.microsoft.com/office/drawing/2014/main" id="{C0DF2F00-4721-4AB0-B2E5-0D6A633925CB}"/>
               </a:ext>
             </a:extLst>
           </p:cNvPr>
@@ -9686,7 +9694,7 @@
           <p:cNvPr id="12" name="">
             <a:extLst xmlns:a="http://schemas.openxmlformats.org/drawingml/2006/main">
               <a:ext uri="{FF2B5EF4-FFF2-40B4-BE49-F238E27FC236}">
-                <a16:creationId xmlns:a16="http://schemas.microsoft.com/office/drawing/2014/main" id="{F090A864-D21B-4662-9A95-846B35D9B39C}"/>
+                <a16:creationId xmlns:a16="http://schemas.microsoft.com/office/drawing/2014/main" id="{CF7DE4D9-A9B6-40F7-BCF4-F77C5446B5E2}"/>
               </a:ext>
             </a:extLst>
           </p:cNvPr>
@@ -9718,7 +9726,7 @@
           <p:cNvPr id="13" name="">
             <a:extLst xmlns:a="http://schemas.openxmlformats.org/drawingml/2006/main">
               <a:ext uri="{FF2B5EF4-FFF2-40B4-BE49-F238E27FC236}">
-                <a16:creationId xmlns:a16="http://schemas.microsoft.com/office/drawing/2014/main" id="{AB02FD3F-70C8-4F86-8ED3-0A058FC45C82}"/>
+                <a16:creationId xmlns:a16="http://schemas.microsoft.com/office/drawing/2014/main" id="{67B27883-695A-46CD-BCFF-D9F9BC55AE8B}"/>
               </a:ext>
             </a:extLst>
           </p:cNvPr>
@@ -9775,7 +9783,7 @@
           <p:cNvPr id="14" name="">
             <a:extLst xmlns:a="http://schemas.openxmlformats.org/drawingml/2006/main">
               <a:ext uri="{FF2B5EF4-FFF2-40B4-BE49-F238E27FC236}">
-                <a16:creationId xmlns:a16="http://schemas.microsoft.com/office/drawing/2014/main" id="{2CA23813-DB31-40B8-9D57-16F12B059EFD}"/>
+                <a16:creationId xmlns:a16="http://schemas.microsoft.com/office/drawing/2014/main" id="{5A8F8E37-D574-4A9A-8411-62B08EDF9979}"/>
               </a:ext>
             </a:extLst>
           </p:cNvPr>
@@ -9830,7 +9838,7 @@
     </p:spTree>
     <p:extLst>
       <p:ext uri="{BB962C8B-B14F-4D97-AF65-F5344CB8AC3E}">
-        <p14:creationId xmlns:p14="http://schemas.microsoft.com/office/powerpoint/2010/main" val="2050291958"/>
+        <p14:creationId xmlns:p14="http://schemas.microsoft.com/office/powerpoint/2010/main" val="699546688"/>
       </p:ext>
     </p:extLst>
   </p:cSld>
@@ -10031,7 +10039,7 @@
           <p:cNvPr id="16" name="">
             <a:extLst xmlns:a="http://schemas.openxmlformats.org/drawingml/2006/main">
               <a:ext uri="{FF2B5EF4-FFF2-40B4-BE49-F238E27FC236}">
-                <a16:creationId xmlns:a16="http://schemas.microsoft.com/office/drawing/2014/main" id="{0197DC13-98FD-4DF2-A0D2-0BCF7690A5E3}"/>
+                <a16:creationId xmlns:a16="http://schemas.microsoft.com/office/drawing/2014/main" id="{ADCF1430-893A-4A17-BFC2-808F7348D445}"/>
               </a:ext>
             </a:extLst>
           </p:cNvPr>
@@ -10063,7 +10071,7 @@
           <p:cNvPr id="2" name="">
             <a:extLst xmlns:a="http://schemas.openxmlformats.org/drawingml/2006/main">
               <a:ext uri="{FF2B5EF4-FFF2-40B4-BE49-F238E27FC236}">
-                <a16:creationId xmlns:a16="http://schemas.microsoft.com/office/drawing/2014/main" id="{F662AF28-9A4F-45FF-BFBF-14F18422446B}"/>
+                <a16:creationId xmlns:a16="http://schemas.microsoft.com/office/drawing/2014/main" id="{3E3ED29F-198B-4844-9CA6-645C3BC820D1}"/>
               </a:ext>
             </a:extLst>
           </p:cNvPr>
@@ -10120,7 +10128,7 @@
           <p:cNvPr id="3" name="">
             <a:extLst xmlns:a="http://schemas.openxmlformats.org/drawingml/2006/main">
               <a:ext uri="{FF2B5EF4-FFF2-40B4-BE49-F238E27FC236}">
-                <a16:creationId xmlns:a16="http://schemas.microsoft.com/office/drawing/2014/main" id="{E938F884-22ED-4E07-A71E-7F78BFB8D73D}"/>
+                <a16:creationId xmlns:a16="http://schemas.microsoft.com/office/drawing/2014/main" id="{652EDA50-6447-4172-8A6A-E3BBA78286A3}"/>
               </a:ext>
             </a:extLst>
           </p:cNvPr>
@@ -10152,7 +10160,7 @@
           <p:cNvPr id="4" name="">
             <a:extLst xmlns:a="http://schemas.openxmlformats.org/drawingml/2006/main">
               <a:ext uri="{FF2B5EF4-FFF2-40B4-BE49-F238E27FC236}">
-                <a16:creationId xmlns:a16="http://schemas.microsoft.com/office/drawing/2014/main" id="{634224F1-7FD4-4131-8450-333755324628}"/>
+                <a16:creationId xmlns:a16="http://schemas.microsoft.com/office/drawing/2014/main" id="{CB0C480A-7BC0-46E8-9406-249895B866D2}"/>
               </a:ext>
             </a:extLst>
           </p:cNvPr>
@@ -10209,7 +10217,7 @@
           <p:cNvPr id="5" name="">
             <a:extLst xmlns:a="http://schemas.openxmlformats.org/drawingml/2006/main">
               <a:ext uri="{FF2B5EF4-FFF2-40B4-BE49-F238E27FC236}">
-                <a16:creationId xmlns:a16="http://schemas.microsoft.com/office/drawing/2014/main" id="{52DE84F3-4EA3-49DB-B468-387EE85FA837}"/>
+                <a16:creationId xmlns:a16="http://schemas.microsoft.com/office/drawing/2014/main" id="{BFDDE6BC-35D4-4FAB-A1D0-D427F9BF7D9E}"/>
               </a:ext>
             </a:extLst>
           </p:cNvPr>
@@ -10266,7 +10274,7 @@
           <p:cNvPr id="6" name="">
             <a:extLst xmlns:a="http://schemas.openxmlformats.org/drawingml/2006/main">
               <a:ext uri="{FF2B5EF4-FFF2-40B4-BE49-F238E27FC236}">
-                <a16:creationId xmlns:a16="http://schemas.microsoft.com/office/drawing/2014/main" id="{FE9AF528-04B1-47ED-BFF6-97BD2130AF3D}"/>
+                <a16:creationId xmlns:a16="http://schemas.microsoft.com/office/drawing/2014/main" id="{FBF06662-C602-4F58-BAD7-8161E50CC4A1}"/>
               </a:ext>
             </a:extLst>
           </p:cNvPr>
@@ -10323,7 +10331,7 @@
           <p:cNvPr id="7" name="">
             <a:extLst xmlns:a="http://schemas.openxmlformats.org/drawingml/2006/main">
               <a:ext uri="{FF2B5EF4-FFF2-40B4-BE49-F238E27FC236}">
-                <a16:creationId xmlns:a16="http://schemas.microsoft.com/office/drawing/2014/main" id="{7F399BA9-E58F-4C70-8EFA-1808A384707A}"/>
+                <a16:creationId xmlns:a16="http://schemas.microsoft.com/office/drawing/2014/main" id="{3B4A1296-99BA-4CF2-849C-B8D071C2A56F}"/>
               </a:ext>
             </a:extLst>
           </p:cNvPr>
@@ -10355,7 +10363,7 @@
           <p:cNvPr id="8" name="">
             <a:extLst xmlns:a="http://schemas.openxmlformats.org/drawingml/2006/main">
               <a:ext uri="{FF2B5EF4-FFF2-40B4-BE49-F238E27FC236}">
-                <a16:creationId xmlns:a16="http://schemas.microsoft.com/office/drawing/2014/main" id="{220A81CF-458A-4FD6-8271-9C4BA3DF2D75}"/>
+                <a16:creationId xmlns:a16="http://schemas.microsoft.com/office/drawing/2014/main" id="{75C0C248-E036-4E00-86EA-6F9675430CB8}"/>
               </a:ext>
             </a:extLst>
           </p:cNvPr>
@@ -10412,7 +10420,7 @@
           <p:cNvPr id="9" name="">
             <a:extLst xmlns:a="http://schemas.openxmlformats.org/drawingml/2006/main">
               <a:ext uri="{FF2B5EF4-FFF2-40B4-BE49-F238E27FC236}">
-                <a16:creationId xmlns:a16="http://schemas.microsoft.com/office/drawing/2014/main" id="{09AAD6B9-3C17-40E5-8AD6-59CCDF5CE772}"/>
+                <a16:creationId xmlns:a16="http://schemas.microsoft.com/office/drawing/2014/main" id="{7E48F1F7-8744-4FEB-8693-863D140F931F}"/>
               </a:ext>
             </a:extLst>
           </p:cNvPr>
@@ -10469,7 +10477,7 @@
           <p:cNvPr id="10" name="">
             <a:extLst xmlns:a="http://schemas.openxmlformats.org/drawingml/2006/main">
               <a:ext uri="{FF2B5EF4-FFF2-40B4-BE49-F238E27FC236}">
-                <a16:creationId xmlns:a16="http://schemas.microsoft.com/office/drawing/2014/main" id="{81D3B158-8C5F-4296-A164-4BDC98DD59A5}"/>
+                <a16:creationId xmlns:a16="http://schemas.microsoft.com/office/drawing/2014/main" id="{79BEC10B-A78D-445E-B77A-30B396225EA7}"/>
               </a:ext>
             </a:extLst>
           </p:cNvPr>
@@ -10526,7 +10534,7 @@
           <p:cNvPr id="11" name="">
             <a:extLst xmlns:a="http://schemas.openxmlformats.org/drawingml/2006/main">
               <a:ext uri="{FF2B5EF4-FFF2-40B4-BE49-F238E27FC236}">
-                <a16:creationId xmlns:a16="http://schemas.microsoft.com/office/drawing/2014/main" id="{B8D7DFA6-B332-4343-AFE1-F8F1125BA894}"/>
+                <a16:creationId xmlns:a16="http://schemas.microsoft.com/office/drawing/2014/main" id="{3B7CC691-C27B-4ADA-82CD-6EDC23D94EA6}"/>
               </a:ext>
             </a:extLst>
           </p:cNvPr>
@@ -10583,7 +10591,7 @@
           <p:cNvPr id="12" name="">
             <a:extLst xmlns:a="http://schemas.openxmlformats.org/drawingml/2006/main">
               <a:ext uri="{FF2B5EF4-FFF2-40B4-BE49-F238E27FC236}">
-                <a16:creationId xmlns:a16="http://schemas.microsoft.com/office/drawing/2014/main" id="{5F8F9335-5695-47B7-9781-BB6B1D56D457}"/>
+                <a16:creationId xmlns:a16="http://schemas.microsoft.com/office/drawing/2014/main" id="{B367F348-0F37-40FD-A00D-40297B4ED7E2}"/>
               </a:ext>
             </a:extLst>
           </p:cNvPr>
@@ -10640,7 +10648,7 @@
           <p:cNvPr id="13" name="">
             <a:extLst xmlns:a="http://schemas.openxmlformats.org/drawingml/2006/main">
               <a:ext uri="{FF2B5EF4-FFF2-40B4-BE49-F238E27FC236}">
-                <a16:creationId xmlns:a16="http://schemas.microsoft.com/office/drawing/2014/main" id="{DD3B0084-CF16-4B35-899A-DEDB414DD41E}"/>
+                <a16:creationId xmlns:a16="http://schemas.microsoft.com/office/drawing/2014/main" id="{E7089952-CE5A-4AFE-86C1-E405CA83C21A}"/>
               </a:ext>
             </a:extLst>
           </p:cNvPr>
@@ -10697,7 +10705,7 @@
           <p:cNvPr id="14" name="">
             <a:extLst xmlns:a="http://schemas.openxmlformats.org/drawingml/2006/main">
               <a:ext uri="{FF2B5EF4-FFF2-40B4-BE49-F238E27FC236}">
-                <a16:creationId xmlns:a16="http://schemas.microsoft.com/office/drawing/2014/main" id="{423C6BEC-A1C7-4C5D-8395-4AE59EE3E401}"/>
+                <a16:creationId xmlns:a16="http://schemas.microsoft.com/office/drawing/2014/main" id="{47DBCBA8-8324-4609-A6D5-7CAD8CEB1C4A}"/>
               </a:ext>
             </a:extLst>
           </p:cNvPr>
@@ -10754,7 +10762,7 @@
           <p:cNvPr id="15" name="">
             <a:extLst xmlns:a="http://schemas.openxmlformats.org/drawingml/2006/main">
               <a:ext uri="{FF2B5EF4-FFF2-40B4-BE49-F238E27FC236}">
-                <a16:creationId xmlns:a16="http://schemas.microsoft.com/office/drawing/2014/main" id="{E0121924-1677-4613-8C26-2A5322C4844B}"/>
+                <a16:creationId xmlns:a16="http://schemas.microsoft.com/office/drawing/2014/main" id="{977DCC49-A276-41AA-A778-2DA6E7B78173}"/>
               </a:ext>
             </a:extLst>
           </p:cNvPr>
@@ -10809,7 +10817,7 @@
     </p:spTree>
     <p:extLst>
       <p:ext uri="{BB962C8B-B14F-4D97-AF65-F5344CB8AC3E}">
-        <p14:creationId xmlns:p14="http://schemas.microsoft.com/office/powerpoint/2010/main" val="82560372"/>
+        <p14:creationId xmlns:p14="http://schemas.microsoft.com/office/powerpoint/2010/main" val="2043498381"/>
       </p:ext>
     </p:extLst>
   </p:cSld>
@@ -10964,7 +10972,7 @@
           <p:cNvPr id="16" name="">
             <a:extLst xmlns:a="http://schemas.openxmlformats.org/drawingml/2006/main">
               <a:ext uri="{FF2B5EF4-FFF2-40B4-BE49-F238E27FC236}">
-                <a16:creationId xmlns:a16="http://schemas.microsoft.com/office/drawing/2014/main" id="{C33DBD04-D288-405D-A58E-6BB5D376A67B}"/>
+                <a16:creationId xmlns:a16="http://schemas.microsoft.com/office/drawing/2014/main" id="{5F26155D-6A2F-4799-B45B-787BC0B26D32}"/>
               </a:ext>
             </a:extLst>
           </p:cNvPr>
@@ -10996,7 +11004,7 @@
           <p:cNvPr id="2" name="">
             <a:extLst xmlns:a="http://schemas.openxmlformats.org/drawingml/2006/main">
               <a:ext uri="{FF2B5EF4-FFF2-40B4-BE49-F238E27FC236}">
-                <a16:creationId xmlns:a16="http://schemas.microsoft.com/office/drawing/2014/main" id="{0965D5B9-6647-452B-BF69-7D965BD5D98A}"/>
+                <a16:creationId xmlns:a16="http://schemas.microsoft.com/office/drawing/2014/main" id="{84BB21AE-0547-4B2D-8C76-D60051140C08}"/>
               </a:ext>
             </a:extLst>
           </p:cNvPr>
@@ -11053,7 +11061,7 @@
           <p:cNvPr id="3" name="">
             <a:extLst xmlns:a="http://schemas.openxmlformats.org/drawingml/2006/main">
               <a:ext uri="{FF2B5EF4-FFF2-40B4-BE49-F238E27FC236}">
-                <a16:creationId xmlns:a16="http://schemas.microsoft.com/office/drawing/2014/main" id="{C387A00A-27A0-4B80-91C7-4D47C0C76F76}"/>
+                <a16:creationId xmlns:a16="http://schemas.microsoft.com/office/drawing/2014/main" id="{4A83199B-793F-42DD-A218-92D38541554F}"/>
               </a:ext>
             </a:extLst>
           </p:cNvPr>
@@ -11085,7 +11093,7 @@
           <p:cNvPr id="4" name="">
             <a:extLst xmlns:a="http://schemas.openxmlformats.org/drawingml/2006/main">
               <a:ext uri="{FF2B5EF4-FFF2-40B4-BE49-F238E27FC236}">
-                <a16:creationId xmlns:a16="http://schemas.microsoft.com/office/drawing/2014/main" id="{769B47C4-8B32-47A2-9B46-B31B1A5AC47C}"/>
+                <a16:creationId xmlns:a16="http://schemas.microsoft.com/office/drawing/2014/main" id="{CD733C86-5E4A-4022-B236-FCB4C6ED7E98}"/>
               </a:ext>
             </a:extLst>
           </p:cNvPr>
@@ -11142,7 +11150,7 @@
           <p:cNvPr id="5" name="">
             <a:extLst xmlns:a="http://schemas.openxmlformats.org/drawingml/2006/main">
               <a:ext uri="{FF2B5EF4-FFF2-40B4-BE49-F238E27FC236}">
-                <a16:creationId xmlns:a16="http://schemas.microsoft.com/office/drawing/2014/main" id="{27D15697-C8A1-4AB3-92FE-EAB8FC88E5B5}"/>
+                <a16:creationId xmlns:a16="http://schemas.microsoft.com/office/drawing/2014/main" id="{011E1548-F38A-46BC-A1BF-B271EF6A92E3}"/>
               </a:ext>
             </a:extLst>
           </p:cNvPr>
@@ -11199,7 +11207,7 @@
           <p:cNvPr id="6" name="">
             <a:extLst xmlns:a="http://schemas.openxmlformats.org/drawingml/2006/main">
               <a:ext uri="{FF2B5EF4-FFF2-40B4-BE49-F238E27FC236}">
-                <a16:creationId xmlns:a16="http://schemas.microsoft.com/office/drawing/2014/main" id="{3289EBAD-C962-45DE-8E85-CDA4202EF194}"/>
+                <a16:creationId xmlns:a16="http://schemas.microsoft.com/office/drawing/2014/main" id="{2AA92AD7-C7FA-488F-AAE0-0F351E6BDFBE}"/>
               </a:ext>
             </a:extLst>
           </p:cNvPr>
@@ -11256,7 +11264,7 @@
           <p:cNvPr id="7" name="">
             <a:extLst xmlns:a="http://schemas.openxmlformats.org/drawingml/2006/main">
               <a:ext uri="{FF2B5EF4-FFF2-40B4-BE49-F238E27FC236}">
-                <a16:creationId xmlns:a16="http://schemas.microsoft.com/office/drawing/2014/main" id="{C0FB1D77-F633-4BA0-98EC-A5884AABB638}"/>
+                <a16:creationId xmlns:a16="http://schemas.microsoft.com/office/drawing/2014/main" id="{E945DA24-9836-4A13-99BF-0BCAAA7B736E}"/>
               </a:ext>
             </a:extLst>
           </p:cNvPr>
@@ -11288,7 +11296,7 @@
           <p:cNvPr id="8" name="">
             <a:extLst xmlns:a="http://schemas.openxmlformats.org/drawingml/2006/main">
               <a:ext uri="{FF2B5EF4-FFF2-40B4-BE49-F238E27FC236}">
-                <a16:creationId xmlns:a16="http://schemas.microsoft.com/office/drawing/2014/main" id="{3E71B75C-9EF1-42B4-BAED-D99649B9780C}"/>
+                <a16:creationId xmlns:a16="http://schemas.microsoft.com/office/drawing/2014/main" id="{DF90B8AE-0DDC-49BB-9F52-F5CAE733A5D2}"/>
               </a:ext>
             </a:extLst>
           </p:cNvPr>
@@ -11345,7 +11353,7 @@
           <p:cNvPr id="9" name="">
             <a:extLst xmlns:a="http://schemas.openxmlformats.org/drawingml/2006/main">
               <a:ext uri="{FF2B5EF4-FFF2-40B4-BE49-F238E27FC236}">
-                <a16:creationId xmlns:a16="http://schemas.microsoft.com/office/drawing/2014/main" id="{F1A38BB3-06B3-46B8-8B51-BE64C512F569}"/>
+                <a16:creationId xmlns:a16="http://schemas.microsoft.com/office/drawing/2014/main" id="{91D82E56-A7E2-4DA7-9240-C77C8A3C7C71}"/>
               </a:ext>
             </a:extLst>
           </p:cNvPr>
@@ -11406,7 +11414,7 @@
           <p:nvPr/>
         </p:nvPicPr>
         <p:blipFill>
-          <a:blip xmlns:r="http://schemas.openxmlformats.org/officeDocument/2006/relationships" xmlns:a="http://schemas.openxmlformats.org/drawingml/2006/main" r:embed="R4d5ec514ef864e4a"/>
+          <a:blip xmlns:r="http://schemas.openxmlformats.org/officeDocument/2006/relationships" xmlns:a="http://schemas.openxmlformats.org/drawingml/2006/main" r:embed="R801d24399f584ea7"/>
           <a:stretch xmlns:a="http://schemas.openxmlformats.org/drawingml/2006/main"/>
         </p:blipFill>
         <p:spPr>
@@ -11424,7 +11432,7 @@
           <p:cNvPr id="11" name="">
             <a:extLst xmlns:a="http://schemas.openxmlformats.org/drawingml/2006/main">
               <a:ext uri="{FF2B5EF4-FFF2-40B4-BE49-F238E27FC236}">
-                <a16:creationId xmlns:a16="http://schemas.microsoft.com/office/drawing/2014/main" id="{3F2AA452-5270-455F-B57F-9940608403C4}"/>
+                <a16:creationId xmlns:a16="http://schemas.microsoft.com/office/drawing/2014/main" id="{FD95E1E9-8C3E-4377-AA0F-F6E61C447946}"/>
               </a:ext>
             </a:extLst>
           </p:cNvPr>
@@ -11481,7 +11489,7 @@
           <p:cNvPr id="12" name="">
             <a:extLst xmlns:a="http://schemas.openxmlformats.org/drawingml/2006/main">
               <a:ext uri="{FF2B5EF4-FFF2-40B4-BE49-F238E27FC236}">
-                <a16:creationId xmlns:a16="http://schemas.microsoft.com/office/drawing/2014/main" id="{178209EC-F0DE-407C-8B06-FE484853D891}"/>
+                <a16:creationId xmlns:a16="http://schemas.microsoft.com/office/drawing/2014/main" id="{8DFE2A30-47E3-4D68-948E-AF294FCE3C2E}"/>
               </a:ext>
             </a:extLst>
           </p:cNvPr>
@@ -11538,7 +11546,7 @@
           <p:cNvPr id="13" name="">
             <a:extLst xmlns:a="http://schemas.openxmlformats.org/drawingml/2006/main">
               <a:ext uri="{FF2B5EF4-FFF2-40B4-BE49-F238E27FC236}">
-                <a16:creationId xmlns:a16="http://schemas.microsoft.com/office/drawing/2014/main" id="{9FFEFFAD-64F7-4A57-9421-30A76FD0F106}"/>
+                <a16:creationId xmlns:a16="http://schemas.microsoft.com/office/drawing/2014/main" id="{5FABBA1A-50C5-4D18-82B4-A5A642008BAB}"/>
               </a:ext>
             </a:extLst>
           </p:cNvPr>
@@ -11570,7 +11578,7 @@
           <p:cNvPr id="14" name="">
             <a:extLst xmlns:a="http://schemas.openxmlformats.org/drawingml/2006/main">
               <a:ext uri="{FF2B5EF4-FFF2-40B4-BE49-F238E27FC236}">
-                <a16:creationId xmlns:a16="http://schemas.microsoft.com/office/drawing/2014/main" id="{E7ABEE32-7C6A-4CC8-B7E0-0867F14D6289}"/>
+                <a16:creationId xmlns:a16="http://schemas.microsoft.com/office/drawing/2014/main" id="{A33D55C4-03B4-4C62-AA42-62202A69FCA0}"/>
               </a:ext>
             </a:extLst>
           </p:cNvPr>
@@ -11627,7 +11635,7 @@
           <p:cNvPr id="15" name="">
             <a:extLst xmlns:a="http://schemas.openxmlformats.org/drawingml/2006/main">
               <a:ext uri="{FF2B5EF4-FFF2-40B4-BE49-F238E27FC236}">
-                <a16:creationId xmlns:a16="http://schemas.microsoft.com/office/drawing/2014/main" id="{358ECC72-FEEB-4418-80D9-62E5CA837630}"/>
+                <a16:creationId xmlns:a16="http://schemas.microsoft.com/office/drawing/2014/main" id="{E23C0C49-CC84-478F-B4F2-9725AEA641BB}"/>
               </a:ext>
             </a:extLst>
           </p:cNvPr>
@@ -11682,7 +11690,7 @@
     </p:spTree>
     <p:extLst>
       <p:ext uri="{BB962C8B-B14F-4D97-AF65-F5344CB8AC3E}">
-        <p14:creationId xmlns:p14="http://schemas.microsoft.com/office/powerpoint/2010/main" val="1718684208"/>
+        <p14:creationId xmlns:p14="http://schemas.microsoft.com/office/powerpoint/2010/main" val="53507494"/>
       </p:ext>
     </p:extLst>
   </p:cSld>
@@ -11837,7 +11845,7 @@
           <p:cNvPr id="23" name="">
             <a:extLst xmlns:a="http://schemas.openxmlformats.org/drawingml/2006/main">
               <a:ext uri="{FF2B5EF4-FFF2-40B4-BE49-F238E27FC236}">
-                <a16:creationId xmlns:a16="http://schemas.microsoft.com/office/drawing/2014/main" id="{9ECC1CA0-E6AB-47CD-A9D8-42282B113F20}"/>
+                <a16:creationId xmlns:a16="http://schemas.microsoft.com/office/drawing/2014/main" id="{42D16030-4006-4860-B002-879845ED1905}"/>
               </a:ext>
             </a:extLst>
           </p:cNvPr>
@@ -11869,7 +11877,7 @@
           <p:cNvPr id="2" name="">
             <a:extLst xmlns:a="http://schemas.openxmlformats.org/drawingml/2006/main">
               <a:ext uri="{FF2B5EF4-FFF2-40B4-BE49-F238E27FC236}">
-                <a16:creationId xmlns:a16="http://schemas.microsoft.com/office/drawing/2014/main" id="{233FF8A5-D74D-400F-BFC1-8EE225A38CDF}"/>
+                <a16:creationId xmlns:a16="http://schemas.microsoft.com/office/drawing/2014/main" id="{418FF4AF-4FB3-435A-9141-9D9E2982ADE3}"/>
               </a:ext>
             </a:extLst>
           </p:cNvPr>
@@ -11926,7 +11934,7 @@
           <p:cNvPr id="3" name="">
             <a:extLst xmlns:a="http://schemas.openxmlformats.org/drawingml/2006/main">
               <a:ext uri="{FF2B5EF4-FFF2-40B4-BE49-F238E27FC236}">
-                <a16:creationId xmlns:a16="http://schemas.microsoft.com/office/drawing/2014/main" id="{3C7A6E3D-17C1-4DED-9E2C-E0C4261E80D3}"/>
+                <a16:creationId xmlns:a16="http://schemas.microsoft.com/office/drawing/2014/main" id="{CB87A688-6F09-47F2-A113-C7926CE35650}"/>
               </a:ext>
             </a:extLst>
           </p:cNvPr>
@@ -11958,7 +11966,7 @@
           <p:cNvPr id="4" name="">
             <a:extLst xmlns:a="http://schemas.openxmlformats.org/drawingml/2006/main">
               <a:ext uri="{FF2B5EF4-FFF2-40B4-BE49-F238E27FC236}">
-                <a16:creationId xmlns:a16="http://schemas.microsoft.com/office/drawing/2014/main" id="{D2B3C88C-2F57-4A0E-9B57-8EA506644D3D}"/>
+                <a16:creationId xmlns:a16="http://schemas.microsoft.com/office/drawing/2014/main" id="{A4D3938C-63E5-4234-812B-024873FEAA5E}"/>
               </a:ext>
             </a:extLst>
           </p:cNvPr>
@@ -12015,7 +12023,7 @@
           <p:cNvPr id="5" name="">
             <a:extLst xmlns:a="http://schemas.openxmlformats.org/drawingml/2006/main">
               <a:ext uri="{FF2B5EF4-FFF2-40B4-BE49-F238E27FC236}">
-                <a16:creationId xmlns:a16="http://schemas.microsoft.com/office/drawing/2014/main" id="{FA635803-3FC6-41E3-A058-70B7A344358B}"/>
+                <a16:creationId xmlns:a16="http://schemas.microsoft.com/office/drawing/2014/main" id="{EB249186-6786-4F05-82E9-D786054A66F5}"/>
               </a:ext>
             </a:extLst>
           </p:cNvPr>
@@ -12072,7 +12080,7 @@
           <p:cNvPr id="6" name="">
             <a:extLst xmlns:a="http://schemas.openxmlformats.org/drawingml/2006/main">
               <a:ext uri="{FF2B5EF4-FFF2-40B4-BE49-F238E27FC236}">
-                <a16:creationId xmlns:a16="http://schemas.microsoft.com/office/drawing/2014/main" id="{487F7609-34D1-497A-9183-4AA29750C16F}"/>
+                <a16:creationId xmlns:a16="http://schemas.microsoft.com/office/drawing/2014/main" id="{B73C41EC-130B-439F-8FC2-946BE2FCABEA}"/>
               </a:ext>
             </a:extLst>
           </p:cNvPr>
@@ -12129,7 +12137,7 @@
           <p:cNvPr id="7" name="">
             <a:extLst xmlns:a="http://schemas.openxmlformats.org/drawingml/2006/main">
               <a:ext uri="{FF2B5EF4-FFF2-40B4-BE49-F238E27FC236}">
-                <a16:creationId xmlns:a16="http://schemas.microsoft.com/office/drawing/2014/main" id="{0D1903A0-0877-4DCC-BF44-7C95A6643C3B}"/>
+                <a16:creationId xmlns:a16="http://schemas.microsoft.com/office/drawing/2014/main" id="{5E0772E4-EB3A-405D-9545-9D25F0D2F053}"/>
               </a:ext>
             </a:extLst>
           </p:cNvPr>
@@ -12161,7 +12169,7 @@
           <p:cNvPr id="8" name="">
             <a:extLst xmlns:a="http://schemas.openxmlformats.org/drawingml/2006/main">
               <a:ext uri="{FF2B5EF4-FFF2-40B4-BE49-F238E27FC236}">
-                <a16:creationId xmlns:a16="http://schemas.microsoft.com/office/drawing/2014/main" id="{0847769A-0D6B-4AF0-9214-AA42114E5835}"/>
+                <a16:creationId xmlns:a16="http://schemas.microsoft.com/office/drawing/2014/main" id="{E4D3A878-E0F5-4772-9788-E732871633C5}"/>
               </a:ext>
             </a:extLst>
           </p:cNvPr>
@@ -12218,7 +12226,7 @@
           <p:cNvPr id="9" name="">
             <a:extLst xmlns:a="http://schemas.openxmlformats.org/drawingml/2006/main">
               <a:ext uri="{FF2B5EF4-FFF2-40B4-BE49-F238E27FC236}">
-                <a16:creationId xmlns:a16="http://schemas.microsoft.com/office/drawing/2014/main" id="{EC6EEFA2-6B44-431C-8D6A-CC0AE9CC35CA}"/>
+                <a16:creationId xmlns:a16="http://schemas.microsoft.com/office/drawing/2014/main" id="{3A5E7AAE-D4D2-452E-8EE3-F9DC1F0D162B}"/>
               </a:ext>
             </a:extLst>
           </p:cNvPr>
@@ -12275,7 +12283,7 @@
           <p:cNvPr id="10" name="">
             <a:extLst xmlns:a="http://schemas.openxmlformats.org/drawingml/2006/main">
               <a:ext uri="{FF2B5EF4-FFF2-40B4-BE49-F238E27FC236}">
-                <a16:creationId xmlns:a16="http://schemas.microsoft.com/office/drawing/2014/main" id="{3EA7F4BC-7453-4AC3-BEDC-4A06F1FAFC2A}"/>
+                <a16:creationId xmlns:a16="http://schemas.microsoft.com/office/drawing/2014/main" id="{906712D7-D6DA-4B29-BFDC-EB0C2161869B}"/>
               </a:ext>
             </a:extLst>
           </p:cNvPr>
@@ -12309,7 +12317,7 @@
           <p:cNvPr id="11" name="">
             <a:extLst xmlns:a="http://schemas.openxmlformats.org/drawingml/2006/main">
               <a:ext uri="{FF2B5EF4-FFF2-40B4-BE49-F238E27FC236}">
-                <a16:creationId xmlns:a16="http://schemas.microsoft.com/office/drawing/2014/main" id="{06F7226D-C1FF-4BCB-B7DF-6F45FEF98B10}"/>
+                <a16:creationId xmlns:a16="http://schemas.microsoft.com/office/drawing/2014/main" id="{55E210B4-01F1-4CF9-A994-09BD8B293860}"/>
               </a:ext>
             </a:extLst>
           </p:cNvPr>
@@ -12341,7 +12349,7 @@
           <p:cNvPr id="12" name="">
             <a:extLst xmlns:a="http://schemas.openxmlformats.org/drawingml/2006/main">
               <a:ext uri="{FF2B5EF4-FFF2-40B4-BE49-F238E27FC236}">
-                <a16:creationId xmlns:a16="http://schemas.microsoft.com/office/drawing/2014/main" id="{E4C9CE4B-120A-484A-A0C1-5D156B37ADBE}"/>
+                <a16:creationId xmlns:a16="http://schemas.microsoft.com/office/drawing/2014/main" id="{59F524A1-CB04-45EF-A118-E5F9E1EEAE9F}"/>
               </a:ext>
             </a:extLst>
           </p:cNvPr>
@@ -12398,7 +12406,7 @@
           <p:cNvPr id="13" name="">
             <a:extLst xmlns:a="http://schemas.openxmlformats.org/drawingml/2006/main">
               <a:ext uri="{FF2B5EF4-FFF2-40B4-BE49-F238E27FC236}">
-                <a16:creationId xmlns:a16="http://schemas.microsoft.com/office/drawing/2014/main" id="{F63AEAE3-A991-4E1B-A5E9-CCF2B7E772D4}"/>
+                <a16:creationId xmlns:a16="http://schemas.microsoft.com/office/drawing/2014/main" id="{6C888C17-5D40-4580-AE39-E68DDB1F8F96}"/>
               </a:ext>
             </a:extLst>
           </p:cNvPr>
@@ -12455,7 +12463,7 @@
           <p:cNvPr id="14" name="">
             <a:extLst xmlns:a="http://schemas.openxmlformats.org/drawingml/2006/main">
               <a:ext uri="{FF2B5EF4-FFF2-40B4-BE49-F238E27FC236}">
-                <a16:creationId xmlns:a16="http://schemas.microsoft.com/office/drawing/2014/main" id="{01920F86-98E2-4DA1-BA9E-4F89FDF340D3}"/>
+                <a16:creationId xmlns:a16="http://schemas.microsoft.com/office/drawing/2014/main" id="{1D869027-BABD-41D2-8504-64C9432E4F16}"/>
               </a:ext>
             </a:extLst>
           </p:cNvPr>
@@ -12489,7 +12497,7 @@
           <p:cNvPr id="15" name="">
             <a:extLst xmlns:a="http://schemas.openxmlformats.org/drawingml/2006/main">
               <a:ext uri="{FF2B5EF4-FFF2-40B4-BE49-F238E27FC236}">
-                <a16:creationId xmlns:a16="http://schemas.microsoft.com/office/drawing/2014/main" id="{08A408A5-B0A5-4695-BF22-621B24B33853}"/>
+                <a16:creationId xmlns:a16="http://schemas.microsoft.com/office/drawing/2014/main" id="{79C35980-CDF0-4C94-A572-2999A3EB9834}"/>
               </a:ext>
             </a:extLst>
           </p:cNvPr>
@@ -12521,7 +12529,7 @@
           <p:cNvPr id="16" name="">
             <a:extLst xmlns:a="http://schemas.openxmlformats.org/drawingml/2006/main">
               <a:ext uri="{FF2B5EF4-FFF2-40B4-BE49-F238E27FC236}">
-                <a16:creationId xmlns:a16="http://schemas.microsoft.com/office/drawing/2014/main" id="{009B4D23-044D-4161-A58C-54B56792216A}"/>
+                <a16:creationId xmlns:a16="http://schemas.microsoft.com/office/drawing/2014/main" id="{8165967F-5CDD-4B93-BFD9-400EFEF85B1C}"/>
               </a:ext>
             </a:extLst>
           </p:cNvPr>
@@ -12578,7 +12586,7 @@
           <p:cNvPr id="17" name="">
             <a:extLst xmlns:a="http://schemas.openxmlformats.org/drawingml/2006/main">
               <a:ext uri="{FF2B5EF4-FFF2-40B4-BE49-F238E27FC236}">
-                <a16:creationId xmlns:a16="http://schemas.microsoft.com/office/drawing/2014/main" id="{D92DB21F-0869-42DC-AB75-955BF7765B6E}"/>
+                <a16:creationId xmlns:a16="http://schemas.microsoft.com/office/drawing/2014/main" id="{BCB46B63-AF6F-437C-9DF7-AFDD168F82B2}"/>
               </a:ext>
             </a:extLst>
           </p:cNvPr>
@@ -12635,7 +12643,7 @@
           <p:cNvPr id="18" name="">
             <a:extLst xmlns:a="http://schemas.openxmlformats.org/drawingml/2006/main">
               <a:ext uri="{FF2B5EF4-FFF2-40B4-BE49-F238E27FC236}">
-                <a16:creationId xmlns:a16="http://schemas.microsoft.com/office/drawing/2014/main" id="{C308E13F-D5FC-43B7-AB9D-8B5C9CDC461A}"/>
+                <a16:creationId xmlns:a16="http://schemas.microsoft.com/office/drawing/2014/main" id="{24EA9FB3-913A-4A12-8829-627242400AC4}"/>
               </a:ext>
             </a:extLst>
           </p:cNvPr>
@@ -12669,7 +12677,7 @@
           <p:cNvPr id="19" name="">
             <a:extLst xmlns:a="http://schemas.openxmlformats.org/drawingml/2006/main">
               <a:ext uri="{FF2B5EF4-FFF2-40B4-BE49-F238E27FC236}">
-                <a16:creationId xmlns:a16="http://schemas.microsoft.com/office/drawing/2014/main" id="{E262FA19-D453-45B0-AAA0-C7CE041DB6C4}"/>
+                <a16:creationId xmlns:a16="http://schemas.microsoft.com/office/drawing/2014/main" id="{AAF3AD1F-6F14-4073-AF41-751AA2F82E27}"/>
               </a:ext>
             </a:extLst>
           </p:cNvPr>
@@ -12701,7 +12709,7 @@
           <p:cNvPr id="20" name="">
             <a:extLst xmlns:a="http://schemas.openxmlformats.org/drawingml/2006/main">
               <a:ext uri="{FF2B5EF4-FFF2-40B4-BE49-F238E27FC236}">
-                <a16:creationId xmlns:a16="http://schemas.microsoft.com/office/drawing/2014/main" id="{D10971D5-6B4B-4570-8C6F-11A9152ECBEC}"/>
+                <a16:creationId xmlns:a16="http://schemas.microsoft.com/office/drawing/2014/main" id="{FD84622E-3C7E-4FAB-BC42-CAC15F764D28}"/>
               </a:ext>
             </a:extLst>
           </p:cNvPr>
@@ -12758,7 +12766,7 @@
           <p:cNvPr id="21" name="">
             <a:extLst xmlns:a="http://schemas.openxmlformats.org/drawingml/2006/main">
               <a:ext uri="{FF2B5EF4-FFF2-40B4-BE49-F238E27FC236}">
-                <a16:creationId xmlns:a16="http://schemas.microsoft.com/office/drawing/2014/main" id="{8BD3BE39-DFD2-47E9-9EB6-89F51505A7D5}"/>
+                <a16:creationId xmlns:a16="http://schemas.microsoft.com/office/drawing/2014/main" id="{FD448EAC-0CCB-4737-A308-2D1B5C3BADE7}"/>
               </a:ext>
             </a:extLst>
           </p:cNvPr>
@@ -12815,7 +12823,7 @@
           <p:cNvPr id="22" name="">
             <a:extLst xmlns:a="http://schemas.openxmlformats.org/drawingml/2006/main">
               <a:ext uri="{FF2B5EF4-FFF2-40B4-BE49-F238E27FC236}">
-                <a16:creationId xmlns:a16="http://schemas.microsoft.com/office/drawing/2014/main" id="{1FC4ABAE-4EA6-49D8-9A8F-F1F16E19D8AE}"/>
+                <a16:creationId xmlns:a16="http://schemas.microsoft.com/office/drawing/2014/main" id="{220242DD-6ED8-4917-AB01-CDF2EFE0082D}"/>
               </a:ext>
             </a:extLst>
           </p:cNvPr>
@@ -12870,7 +12878,7 @@
     </p:spTree>
     <p:extLst>
       <p:ext uri="{BB962C8B-B14F-4D97-AF65-F5344CB8AC3E}">
-        <p14:creationId xmlns:p14="http://schemas.microsoft.com/office/powerpoint/2010/main" val="1611992324"/>
+        <p14:creationId xmlns:p14="http://schemas.microsoft.com/office/powerpoint/2010/main" val="532505290"/>
       </p:ext>
     </p:extLst>
   </p:cSld>
@@ -13071,7 +13079,7 @@
           <p:cNvPr id="22" name="">
             <a:extLst xmlns:a="http://schemas.openxmlformats.org/drawingml/2006/main">
               <a:ext uri="{FF2B5EF4-FFF2-40B4-BE49-F238E27FC236}">
-                <a16:creationId xmlns:a16="http://schemas.microsoft.com/office/drawing/2014/main" id="{6E01C725-3DB6-4295-8F37-23FE03B24F30}"/>
+                <a16:creationId xmlns:a16="http://schemas.microsoft.com/office/drawing/2014/main" id="{478292FF-01BC-40F3-A6FC-799F89538108}"/>
               </a:ext>
             </a:extLst>
           </p:cNvPr>
@@ -13103,7 +13111,7 @@
           <p:cNvPr id="2" name="">
             <a:extLst xmlns:a="http://schemas.openxmlformats.org/drawingml/2006/main">
               <a:ext uri="{FF2B5EF4-FFF2-40B4-BE49-F238E27FC236}">
-                <a16:creationId xmlns:a16="http://schemas.microsoft.com/office/drawing/2014/main" id="{8F8E5BED-0DF9-4B50-87CD-486A85A68D23}"/>
+                <a16:creationId xmlns:a16="http://schemas.microsoft.com/office/drawing/2014/main" id="{D71A4BD4-FD61-493C-87D7-30BB24C7053E}"/>
               </a:ext>
             </a:extLst>
           </p:cNvPr>
@@ -13160,7 +13168,7 @@
           <p:cNvPr id="3" name="">
             <a:extLst xmlns:a="http://schemas.openxmlformats.org/drawingml/2006/main">
               <a:ext uri="{FF2B5EF4-FFF2-40B4-BE49-F238E27FC236}">
-                <a16:creationId xmlns:a16="http://schemas.microsoft.com/office/drawing/2014/main" id="{D302393A-F04A-4245-8B43-D6CC3FAA84C9}"/>
+                <a16:creationId xmlns:a16="http://schemas.microsoft.com/office/drawing/2014/main" id="{BBEAE7AF-7604-480A-9AE6-D89CD67DF56E}"/>
               </a:ext>
             </a:extLst>
           </p:cNvPr>
@@ -13192,7 +13200,7 @@
           <p:cNvPr id="4" name="">
             <a:extLst xmlns:a="http://schemas.openxmlformats.org/drawingml/2006/main">
               <a:ext uri="{FF2B5EF4-FFF2-40B4-BE49-F238E27FC236}">
-                <a16:creationId xmlns:a16="http://schemas.microsoft.com/office/drawing/2014/main" id="{0443CE80-33D3-4C56-97A1-5DA8B3CBD22B}"/>
+                <a16:creationId xmlns:a16="http://schemas.microsoft.com/office/drawing/2014/main" id="{353B2FE9-E541-44C2-BCED-36A597B500B4}"/>
               </a:ext>
             </a:extLst>
           </p:cNvPr>
@@ -13249,7 +13257,7 @@
           <p:cNvPr id="5" name="">
             <a:extLst xmlns:a="http://schemas.openxmlformats.org/drawingml/2006/main">
               <a:ext uri="{FF2B5EF4-FFF2-40B4-BE49-F238E27FC236}">
-                <a16:creationId xmlns:a16="http://schemas.microsoft.com/office/drawing/2014/main" id="{2AF1F01D-FE55-4F9D-8685-1F8F62050B40}"/>
+                <a16:creationId xmlns:a16="http://schemas.microsoft.com/office/drawing/2014/main" id="{5D49BBF5-9445-48CD-83BC-0DCF06065947}"/>
               </a:ext>
             </a:extLst>
           </p:cNvPr>
@@ -13306,7 +13314,7 @@
           <p:cNvPr id="6" name="">
             <a:extLst xmlns:a="http://schemas.openxmlformats.org/drawingml/2006/main">
               <a:ext uri="{FF2B5EF4-FFF2-40B4-BE49-F238E27FC236}">
-                <a16:creationId xmlns:a16="http://schemas.microsoft.com/office/drawing/2014/main" id="{5E649EE3-EFAF-4B65-B3D3-E6EB281C3D00}"/>
+                <a16:creationId xmlns:a16="http://schemas.microsoft.com/office/drawing/2014/main" id="{026A6E65-C819-43BF-BDAB-0E4891DDECA5}"/>
               </a:ext>
             </a:extLst>
           </p:cNvPr>
@@ -13363,7 +13371,7 @@
           <p:cNvPr id="7" name="">
             <a:extLst xmlns:a="http://schemas.openxmlformats.org/drawingml/2006/main">
               <a:ext uri="{FF2B5EF4-FFF2-40B4-BE49-F238E27FC236}">
-                <a16:creationId xmlns:a16="http://schemas.microsoft.com/office/drawing/2014/main" id="{4E1C6C75-185C-4E37-9EBE-EAA33314BD90}"/>
+                <a16:creationId xmlns:a16="http://schemas.microsoft.com/office/drawing/2014/main" id="{42274094-2626-449A-9299-3AD37AB720CF}"/>
               </a:ext>
             </a:extLst>
           </p:cNvPr>
@@ -13395,7 +13403,7 @@
           <p:cNvPr id="8" name="">
             <a:extLst xmlns:a="http://schemas.openxmlformats.org/drawingml/2006/main">
               <a:ext uri="{FF2B5EF4-FFF2-40B4-BE49-F238E27FC236}">
-                <a16:creationId xmlns:a16="http://schemas.microsoft.com/office/drawing/2014/main" id="{986D581A-369B-47B7-90E4-626B81BA0B98}"/>
+                <a16:creationId xmlns:a16="http://schemas.microsoft.com/office/drawing/2014/main" id="{691CA07B-16AE-430D-860A-ED2D53BAB1E1}"/>
               </a:ext>
             </a:extLst>
           </p:cNvPr>
@@ -13452,7 +13460,7 @@
           <p:cNvPr id="9" name="">
             <a:extLst xmlns:a="http://schemas.openxmlformats.org/drawingml/2006/main">
               <a:ext uri="{FF2B5EF4-FFF2-40B4-BE49-F238E27FC236}">
-                <a16:creationId xmlns:a16="http://schemas.microsoft.com/office/drawing/2014/main" id="{B8808E7D-5022-4A7E-AC8D-38409E6E98F6}"/>
+                <a16:creationId xmlns:a16="http://schemas.microsoft.com/office/drawing/2014/main" id="{FBA4DF98-F253-4207-B5EB-B98B57C5123A}"/>
               </a:ext>
             </a:extLst>
           </p:cNvPr>
@@ -13509,7 +13517,7 @@
           <p:cNvPr id="10" name="">
             <a:extLst xmlns:a="http://schemas.openxmlformats.org/drawingml/2006/main">
               <a:ext uri="{FF2B5EF4-FFF2-40B4-BE49-F238E27FC236}">
-                <a16:creationId xmlns:a16="http://schemas.microsoft.com/office/drawing/2014/main" id="{751EFF27-1176-40D5-B15A-30756543C301}"/>
+                <a16:creationId xmlns:a16="http://schemas.microsoft.com/office/drawing/2014/main" id="{01056B59-C7CC-4594-AF83-876EE38858FB}"/>
               </a:ext>
             </a:extLst>
           </p:cNvPr>
@@ -13543,7 +13551,7 @@
           <p:cNvPr id="11" name="">
             <a:extLst xmlns:a="http://schemas.openxmlformats.org/drawingml/2006/main">
               <a:ext uri="{FF2B5EF4-FFF2-40B4-BE49-F238E27FC236}">
-                <a16:creationId xmlns:a16="http://schemas.microsoft.com/office/drawing/2014/main" id="{8667A49E-4725-484D-9E8B-1C8C523DC446}"/>
+                <a16:creationId xmlns:a16="http://schemas.microsoft.com/office/drawing/2014/main" id="{83ABA297-B327-4422-A8A1-6B09377BDD8F}"/>
               </a:ext>
             </a:extLst>
           </p:cNvPr>
@@ -13575,7 +13583,7 @@
           <p:cNvPr id="12" name="">
             <a:extLst xmlns:a="http://schemas.openxmlformats.org/drawingml/2006/main">
               <a:ext uri="{FF2B5EF4-FFF2-40B4-BE49-F238E27FC236}">
-                <a16:creationId xmlns:a16="http://schemas.microsoft.com/office/drawing/2014/main" id="{1D218E8A-FD6C-40FE-90B4-9C9C1FAAC22F}"/>
+                <a16:creationId xmlns:a16="http://schemas.microsoft.com/office/drawing/2014/main" id="{7B1DC3F1-35C4-48E1-B3BE-0BD78FA0D996}"/>
               </a:ext>
             </a:extLst>
           </p:cNvPr>
@@ -13632,7 +13640,7 @@
           <p:cNvPr id="13" name="">
             <a:extLst xmlns:a="http://schemas.openxmlformats.org/drawingml/2006/main">
               <a:ext uri="{FF2B5EF4-FFF2-40B4-BE49-F238E27FC236}">
-                <a16:creationId xmlns:a16="http://schemas.microsoft.com/office/drawing/2014/main" id="{13E30D24-BE67-4EED-B9C8-489B172EFC8D}"/>
+                <a16:creationId xmlns:a16="http://schemas.microsoft.com/office/drawing/2014/main" id="{FDBA084D-6053-45E1-BF72-4C8947C05EC5}"/>
               </a:ext>
             </a:extLst>
           </p:cNvPr>
@@ -13689,7 +13697,7 @@
           <p:cNvPr id="14" name="">
             <a:extLst xmlns:a="http://schemas.openxmlformats.org/drawingml/2006/main">
               <a:ext uri="{FF2B5EF4-FFF2-40B4-BE49-F238E27FC236}">
-                <a16:creationId xmlns:a16="http://schemas.microsoft.com/office/drawing/2014/main" id="{AA08F835-94C1-4965-83C2-873606EBF929}"/>
+                <a16:creationId xmlns:a16="http://schemas.microsoft.com/office/drawing/2014/main" id="{6AA11B38-BBC4-42A3-95E8-6EC1855C4E8D}"/>
               </a:ext>
             </a:extLst>
           </p:cNvPr>
@@ -13723,7 +13731,7 @@
           <p:cNvPr id="15" name="">
             <a:extLst xmlns:a="http://schemas.openxmlformats.org/drawingml/2006/main">
               <a:ext uri="{FF2B5EF4-FFF2-40B4-BE49-F238E27FC236}">
-                <a16:creationId xmlns:a16="http://schemas.microsoft.com/office/drawing/2014/main" id="{EF0660A6-952F-4B85-995B-43C16C9186CF}"/>
+                <a16:creationId xmlns:a16="http://schemas.microsoft.com/office/drawing/2014/main" id="{13669A8C-68D5-45D8-AA2A-2AD706C67FB3}"/>
               </a:ext>
             </a:extLst>
           </p:cNvPr>
@@ -13755,7 +13763,7 @@
           <p:cNvPr id="16" name="">
             <a:extLst xmlns:a="http://schemas.openxmlformats.org/drawingml/2006/main">
               <a:ext uri="{FF2B5EF4-FFF2-40B4-BE49-F238E27FC236}">
-                <a16:creationId xmlns:a16="http://schemas.microsoft.com/office/drawing/2014/main" id="{3D90FE94-19F0-4A92-A422-F8D7383F7CF6}"/>
+                <a16:creationId xmlns:a16="http://schemas.microsoft.com/office/drawing/2014/main" id="{AE4E263D-E942-49FC-BA31-01FBC9951B81}"/>
               </a:ext>
             </a:extLst>
           </p:cNvPr>
@@ -13812,7 +13820,7 @@
           <p:cNvPr id="17" name="">
             <a:extLst xmlns:a="http://schemas.openxmlformats.org/drawingml/2006/main">
               <a:ext uri="{FF2B5EF4-FFF2-40B4-BE49-F238E27FC236}">
-                <a16:creationId xmlns:a16="http://schemas.microsoft.com/office/drawing/2014/main" id="{900D8B41-3BCF-49BD-85EB-6327E8443B5F}"/>
+                <a16:creationId xmlns:a16="http://schemas.microsoft.com/office/drawing/2014/main" id="{E826DC35-1A0F-4E5D-B10A-31FFCCF34B13}"/>
               </a:ext>
             </a:extLst>
           </p:cNvPr>
@@ -13869,7 +13877,7 @@
           <p:cNvPr id="18" name="">
             <a:extLst xmlns:a="http://schemas.openxmlformats.org/drawingml/2006/main">
               <a:ext uri="{FF2B5EF4-FFF2-40B4-BE49-F238E27FC236}">
-                <a16:creationId xmlns:a16="http://schemas.microsoft.com/office/drawing/2014/main" id="{01B8A7F1-8636-4D22-8BA0-C52F8C61B9D4}"/>
+                <a16:creationId xmlns:a16="http://schemas.microsoft.com/office/drawing/2014/main" id="{5A3CEAD9-20CE-4858-89AD-8153116D15BB}"/>
               </a:ext>
             </a:extLst>
           </p:cNvPr>
@@ -13903,7 +13911,7 @@
           <p:cNvPr id="19" name="">
             <a:extLst xmlns:a="http://schemas.openxmlformats.org/drawingml/2006/main">
               <a:ext uri="{FF2B5EF4-FFF2-40B4-BE49-F238E27FC236}">
-                <a16:creationId xmlns:a16="http://schemas.microsoft.com/office/drawing/2014/main" id="{AF0AF422-74B2-40A5-B1C0-CB7B217314F8}"/>
+                <a16:creationId xmlns:a16="http://schemas.microsoft.com/office/drawing/2014/main" id="{02465521-EBF7-4C40-B709-2B7EC6457FDC}"/>
               </a:ext>
             </a:extLst>
           </p:cNvPr>
@@ -13935,7 +13943,7 @@
           <p:cNvPr id="20" name="">
             <a:extLst xmlns:a="http://schemas.openxmlformats.org/drawingml/2006/main">
               <a:ext uri="{FF2B5EF4-FFF2-40B4-BE49-F238E27FC236}">
-                <a16:creationId xmlns:a16="http://schemas.microsoft.com/office/drawing/2014/main" id="{17E72533-93DF-4FC2-945F-AD5051E5A666}"/>
+                <a16:creationId xmlns:a16="http://schemas.microsoft.com/office/drawing/2014/main" id="{17D6C3F4-B9C3-4606-AF90-E2200F44CB23}"/>
               </a:ext>
             </a:extLst>
           </p:cNvPr>
@@ -13992,7 +14000,7 @@
           <p:cNvPr id="21" name="">
             <a:extLst xmlns:a="http://schemas.openxmlformats.org/drawingml/2006/main">
               <a:ext uri="{FF2B5EF4-FFF2-40B4-BE49-F238E27FC236}">
-                <a16:creationId xmlns:a16="http://schemas.microsoft.com/office/drawing/2014/main" id="{15083DF1-962C-4633-8828-1EBEB81CC05A}"/>
+                <a16:creationId xmlns:a16="http://schemas.microsoft.com/office/drawing/2014/main" id="{274C4804-07B1-4A13-AB01-305B3C19E439}"/>
               </a:ext>
             </a:extLst>
           </p:cNvPr>
@@ -14047,7 +14055,7 @@
     </p:spTree>
     <p:extLst>
       <p:ext uri="{BB962C8B-B14F-4D97-AF65-F5344CB8AC3E}">
-        <p14:creationId xmlns:p14="http://schemas.microsoft.com/office/powerpoint/2010/main" val="1977858534"/>
+        <p14:creationId xmlns:p14="http://schemas.microsoft.com/office/powerpoint/2010/main" val="1676563965"/>
       </p:ext>
     </p:extLst>
   </p:cSld>
